--- a/docs/proposals/softbank-ultraman-caravan/SoftBank_Ultraman_未来防衛隊キャラバン_提案資料.pptx
+++ b/docs/proposals/softbank-ultraman-caravan/SoftBank_Ultraman_未来防衛隊キャラバン_提案資料.pptx
@@ -8669,7 +8669,7 @@
                 <a:latin typeface="Yu Gothic"/>
                 <a:ea typeface="Yu Gothic"/>
               </a:rPr>
-              <a:t>ポケモン契約と同様、作成数に上限を設けず、数量に応じた許諾対価を別途支払う設計が自然。</a:t>
+              <a:t>作成数に上限を設けず、数量に応じた許諾対価を別途お支払いする設計を想定しています。</a:t>
             </a:r>
           </a:p>
         </p:txBody>
@@ -10881,7 +10881,7 @@
                 <a:latin typeface="Yu Gothic"/>
                 <a:ea typeface="Yu Gothic"/>
               </a:rPr>
-              <a:t>本命はB案:FY27標準プラン(1億2,000万円)です</a:t>
+              <a:t>推奨はB案:FY27標準プラン(1億2,000万円)です</a:t>
             </a:r>
           </a:p>
         </p:txBody>
@@ -11282,7 +11282,7 @@
                           <a:latin typeface="Yu Gothic"/>
                           <a:ea typeface="Yu Gothic"/>
                         </a:rPr>
-                        <a:t>年間展開の本命。着ぐるみ不可後のリアル集客を補完</a:t>
+                        <a:t>年間展開の推奨案。FY27以降のリアル集客を補完</a:t>
                       </a:r>
                     </a:p>
                   </a:txBody>
@@ -11897,7 +11897,7 @@
                 <a:latin typeface="Yu Gothic"/>
                 <a:ea typeface="Yu Gothic"/>
               </a:rPr>
-              <a:t>本命はFY27年度の年間活用を前提とした1.2億円プラン(B案)。</a:t>
+              <a:t>推奨は、FY27年度の年間活用を前提とした1.2億円プラン(B案)です。</a:t>
             </a:r>
           </a:p>
         </p:txBody>
@@ -11947,7 +11947,7 @@
                 <a:latin typeface="Yu Gothic"/>
                 <a:ea typeface="Yu Gothic"/>
               </a:rPr>
-              <a:t>背景:現行ポケモン契約(FY26:7,000万円)はイベント・BB・でんきで活用可能。FY27以降も契約は継続予定だが、着ぐるみ利用は不可となる前提。</a:t>
+              <a:t>背景:現行のキャラクターIP施策は、FY27以降もコンテンツ活用が継続される一方、イベントでの着ぐるみ活用は終了予定と伺っております。</a:t>
             </a:r>
           </a:p>
           <a:p>
@@ -11974,7 +11974,7 @@
                 <a:latin typeface="Yu Gothic"/>
                 <a:ea typeface="Yu Gothic"/>
               </a:rPr>
-              <a:t>課題:FY27以降、商業施設イベントにおける「会いに行く理由」=リアル集客機能に空白が生まれる。</a:t>
+              <a:t>課題:FY27以降、商業施設イベントにおける「会いに行く理由」=リアル集客機能に空白が生まれます。</a:t>
             </a:r>
           </a:p>
           <a:p>
@@ -12001,7 +12001,7 @@
                 <a:latin typeface="Yu Gothic"/>
                 <a:ea typeface="Yu Gothic"/>
               </a:rPr>
-              <a:t>解決:ポケモンの置き換えではなく、リアルイベント集客機能をウルトラマンで補完する。2026年7月10日にシリーズ60周年を迎える追い風もある。</a:t>
+              <a:t>解決:現行IPの置き換えではなく、リアルイベント集客機能をウルトラマンで補完します。2026年7月10日にシリーズ60周年を迎える追い風もあります。</a:t>
             </a:r>
           </a:p>
           <a:p>
@@ -12028,7 +12028,7 @@
                 <a:latin typeface="Yu Gothic"/>
                 <a:ea typeface="Yu Gothic"/>
               </a:rPr>
-              <a:t>仕組み:ヒーロー撮影会・館内ミッションラリー・デジタル隊員証で商業施設に呼び込み、SoftBankショップの相談(スマホ・BB・でんき)へ自然に送客。</a:t>
+              <a:t>仕組み:ヒーロー撮影会・館内ミッションラリー・デジタル隊員証で商業施設に呼び込み、SoftBankショップの相談(スマホ・BB・でんき)へ自然に送客します。</a:t>
             </a:r>
           </a:p>
           <a:p>
@@ -12055,7 +12055,7 @@
                 <a:latin typeface="Yu Gothic"/>
                 <a:ea typeface="Yu Gothic"/>
               </a:rPr>
-              <a:t>提案:A案3,500万円(短期検証)/B案1億2,000万円(FY27年間・本命)/C案2億5,000万円(60周年大型展開)。</a:t>
+              <a:t>ご提案:A案3,500万円(短期検証)/B案1億2,000万円(FY27年間・推奨)/C案2億5,000万円(60周年大型展開)。</a:t>
             </a:r>
           </a:p>
         </p:txBody>
@@ -13342,7 +13342,7 @@
                 <a:latin typeface="Yu Gothic"/>
                 <a:ea typeface="Yu Gothic"/>
               </a:rPr>
-              <a:t>稟議上の入口として有効。ただし着ぐるみ不可後の空白を本格的に補完するには規模が小さい。</a:t>
+              <a:t>導入の第一歩として有効。ただしFY27以降の年間集客機能を担うには規模が限定的。</a:t>
             </a:r>
           </a:p>
         </p:txBody>
@@ -13444,7 +13444,7 @@
                 <a:latin typeface="Yu Gothic"/>
                 <a:ea typeface="Yu Gothic"/>
               </a:rPr>
-              <a:t>B案:FY27標準プラン|1億2,000万円(税別)【本命】</a:t>
+              <a:t>B案:FY27標準プラン|1億2,000万円(税別)【推奨】</a:t>
             </a:r>
           </a:p>
         </p:txBody>
@@ -14962,7 +14962,7 @@
                 <a:latin typeface="Yu Gothic"/>
                 <a:ea typeface="Yu Gothic"/>
               </a:rPr>
-              <a:t>B案が本命である理由</a:t>
+              <a:t>B案を推奨する理由</a:t>
             </a:r>
           </a:p>
         </p:txBody>
@@ -15002,7 +15002,7 @@
                 <a:latin typeface="Yu Gothic"/>
                 <a:ea typeface="Yu Gothic"/>
               </a:rPr>
-              <a:t>ポケモン契約7,000万円との単純比較ではなく、「年間IP契約+リアルイベント実行費+店舗送客導線」の総額として評価すべきです</a:t>
+              <a:t>IP使用料単体ではなく、「年間IP契約+リアルイベント実行費+店舗送客導線」の総額としてご評価ください</a:t>
             </a:r>
           </a:p>
         </p:txBody>
@@ -15166,7 +15166,7 @@
                 <a:latin typeface="Yu Gothic"/>
                 <a:ea typeface="Yu Gothic"/>
               </a:rPr>
-              <a:t>ポケモンFY26契約費用7,000万円は年度IP契約の社内ベンチマークとして有効。ただし、B案1億2,000万円はIP使用料だけの金額ではありません。</a:t>
+              <a:t>B案の1億2,000万円は、IP使用料だけの金額ではありません。年間の企画・制作・イベント運営・店舗送客までを含む、実行費一式の総額です。</a:t>
             </a:r>
           </a:p>
         </p:txBody>
@@ -15954,7 +15954,7 @@
                 <a:latin typeface="Yu Gothic"/>
                 <a:ea typeface="Yu Gothic"/>
               </a:rPr>
-              <a:t>60周年文脈を活用した全社大型コンシューマキャンペーン(6〜12か月)。初回稟議には大きく、B案実施後の拡張案として位置づけ</a:t>
+              <a:t>60周年文脈を活用した全社大型コンシューマキャンペーン(6〜12か月)。B案実施後の拡張案としてご提示します</a:t>
             </a:r>
           </a:p>
         </p:txBody>
@@ -20774,7 +20774,7 @@
                 <a:latin typeface="Yu Gothic"/>
                 <a:ea typeface="Yu Gothic"/>
               </a:rPr>
-              <a:t>最終提案:B案 FY27標準プラン</a:t>
+              <a:t>最終ご提案:B案 FY27標準プラン</a:t>
             </a:r>
           </a:p>
         </p:txBody>
@@ -20814,7 +20814,7 @@
                 <a:latin typeface="Yu Gothic"/>
                 <a:ea typeface="Yu Gothic"/>
               </a:rPr>
-              <a:t>ポケモン着ぐるみ不可後のリアルイベント機能を補完する本命施策</a:t>
+              <a:t>FY27以降のリアルイベント集客機能を担う、推奨プランです</a:t>
             </a:r>
           </a:p>
         </p:txBody>
@@ -21338,7 +21338,7 @@
                           <a:latin typeface="Yu Gothic"/>
                           <a:ea typeface="Yu Gothic"/>
                         </a:rPr>
-                        <a:t>ポケモン着ぐるみ不可後のリアルイベント機能を補完する本命施策</a:t>
+                        <a:t>FY27以降のリアルイベント集客機能を担う中核施策</a:t>
                       </a:r>
                     </a:p>
                   </a:txBody>
@@ -21635,7 +21635,7 @@
                 <a:latin typeface="Yu Gothic"/>
                 <a:ea typeface="Yu Gothic"/>
               </a:rPr>
-              <a:t>ポケモン契約との整合/FY27以降の課題/商業施設送客/コンシューマ事業への貢献 — すべてが一本につながります。</a:t>
+              <a:t>現行IP施策との整合/FY27以降の課題/商業施設送客/コンシューマ事業への貢献 — すべてが一本につながります。</a:t>
             </a:r>
           </a:p>
           <a:p>
@@ -21798,7 +21798,7 @@
                 <a:latin typeface="Yu Gothic"/>
                 <a:ea typeface="Yu Gothic"/>
               </a:rPr>
-              <a:t>ご提案のポジション:コンシューマ事業のリアル接点拡張施策</a:t>
+              <a:t>本提案の位置づけ:コンシューマ事業のリアル接点拡張施策</a:t>
             </a:r>
           </a:p>
         </p:txBody>
@@ -21838,7 +21838,7 @@
                 <a:latin typeface="Yu Gothic"/>
                 <a:ea typeface="Yu Gothic"/>
               </a:rPr>
-              <a:t>「IPコラボ」ではなく、コンシューマ事業統括の管掌領域に直結する成長施策としてご提案します</a:t>
+              <a:t>単なるキャラクターコラボではなく、貴社コンシューマ事業の成長に直結する施策としてご提案します</a:t>
             </a:r>
           </a:p>
         </p:txBody>
@@ -22012,7 +22012,7 @@
                 <a:latin typeface="Yu Gothic"/>
                 <a:ea typeface="Yu Gothic"/>
               </a:rPr>
-              <a:t>高島謙一氏は2026年4月1日付で、副社長執行役員 兼 COO コンシューマ事業統括に就任。</a:t>
+              <a:t>貴社コンシューマ事業は、付加価値サービスを備えた料金プランの浸透、グループ経済圏の活用、長期利用が期待できるユーザー層の獲得・定着を通じ、モバイルサービス売上とセグメント利益の継続成長を掲げていらっしゃいます。</a:t>
             </a:r>
           </a:p>
           <a:p>
@@ -22039,7 +22039,7 @@
                 <a:latin typeface="Yu Gothic"/>
                 <a:ea typeface="Yu Gothic"/>
               </a:rPr>
-              <a:t>ソフトバンクのコンシューマ事業は、付加価値サービスを備えた料金プランの浸透、グループ経済圏の活用、長期利用が期待できるユーザー層の獲得・定着を通じ、モバイルサービス売上とセグメント利益の継続成長を目指す方針。</a:t>
+              <a:t>SoftBank/ワイモバイル/LINEMOのマルチブランド展開も、大きな競争優位と拝察しております。</a:t>
             </a:r>
           </a:p>
           <a:p>
@@ -22066,7 +22066,7 @@
                 <a:latin typeface="Yu Gothic"/>
                 <a:ea typeface="Yu Gothic"/>
               </a:rPr>
-              <a:t>SoftBank/ワイモバイル/LINEMOのマルチブランド展開も競争優位として提示されている。</a:t>
+              <a:t>本企画は、この戦略に対して「商業施設でのリアル顧客接点の創出」という形で貢献するものです。</a:t>
             </a:r>
           </a:p>
         </p:txBody>
@@ -22288,7 +22288,7 @@
                 <a:latin typeface="Yu Gothic"/>
                 <a:ea typeface="Yu Gothic"/>
               </a:rPr>
-              <a:t>現行ポケモン契約の整理</a:t>
+              <a:t>現行キャラクターIP施策の整理(ご共有いただいた前提)</a:t>
             </a:r>
           </a:p>
         </p:txBody>
@@ -22328,7 +22328,7 @@
                 <a:latin typeface="Yu Gothic"/>
                 <a:ea typeface="Yu Gothic"/>
               </a:rPr>
-              <a:t>FY27以降も契約は継続予定。ただし着ぐるみ利用が不可となり、リアル集客機能に課題が残ります</a:t>
+              <a:t>FY27以降もコンテンツ活用は継続予定。ただし着ぐるみ活用が終了し、リアル集客機能に課題が残ります</a:t>
             </a:r>
           </a:p>
         </p:txBody>
@@ -22467,7 +22467,7 @@
         </p:nvGraphicFramePr>
         <p:xfrm>
           <a:off x="640080" y="1600200"/>
-          <a:ext cx="7406639" cy="3456432"/>
+          <a:ext cx="7406639" cy="3072384"/>
         </p:xfrm>
         <a:graphic>
           <a:graphicData uri="http://schemas.openxmlformats.org/drawingml/2006/table">
@@ -22541,7 +22541,7 @@
                           <a:latin typeface="Yu Gothic"/>
                           <a:ea typeface="Yu Gothic"/>
                         </a:rPr>
-                        <a:t>契約期間</a:t>
+                        <a:t>契約形態</a:t>
                       </a:r>
                     </a:p>
                   </a:txBody>
@@ -22564,7 +22564,7 @@
                           <a:latin typeface="Yu Gothic"/>
                           <a:ea typeface="Yu Gothic"/>
                         </a:rPr>
-                        <a:t>4月〜3月の年度単位</a:t>
+                        <a:t>年度単位(4月〜3月)での契約</a:t>
                       </a:r>
                     </a:p>
                   </a:txBody>
@@ -22589,7 +22589,7 @@
                           <a:latin typeface="Yu Gothic"/>
                           <a:ea typeface="Yu Gothic"/>
                         </a:rPr>
-                        <a:t>FY26契約費用</a:t>
+                        <a:t>利用可能領域</a:t>
                       </a:r>
                     </a:p>
                   </a:txBody>
@@ -22605,14 +22605,14 @@
                     <a:lstStyle/>
                     <a:p>
                       <a:r>
-                        <a:rPr sz="1150" b="1">
-                          <a:solidFill>
-                            <a:srgbClr val="D60012"/>
-                          </a:solidFill>
-                          <a:latin typeface="Yu Gothic"/>
-                          <a:ea typeface="Yu Gothic"/>
-                        </a:rPr>
-                        <a:t>7,000万円</a:t>
+                        <a:rPr sz="1150" b="0">
+                          <a:solidFill>
+                            <a:srgbClr val="21252B"/>
+                          </a:solidFill>
+                          <a:latin typeface="Yu Gothic"/>
+                          <a:ea typeface="Yu Gothic"/>
+                        </a:rPr>
+                        <a:t>イベント、BB、でんき</a:t>
                       </a:r>
                     </a:p>
                   </a:txBody>
@@ -22637,7 +22637,7 @@
                           <a:latin typeface="Yu Gothic"/>
                           <a:ea typeface="Yu Gothic"/>
                         </a:rPr>
-                        <a:t>利用可能領域</a:t>
+                        <a:t>ノベルティ</a:t>
                       </a:r>
                     </a:p>
                   </a:txBody>
@@ -22660,7 +22660,7 @@
                           <a:latin typeface="Yu Gothic"/>
                           <a:ea typeface="Yu Gothic"/>
                         </a:rPr>
-                        <a:t>イベント、BB、でんき</a:t>
+                        <a:t>作成数制限なし(数量に応じた許諾対価が別途必要)</a:t>
                       </a:r>
                     </a:p>
                   </a:txBody>
@@ -22685,7 +22685,7 @@
                           <a:latin typeface="Yu Gothic"/>
                           <a:ea typeface="Yu Gothic"/>
                         </a:rPr>
-                        <a:t>ノベルティ</a:t>
+                        <a:t>他コンテンツ制限</a:t>
                       </a:r>
                     </a:p>
                   </a:txBody>
@@ -22708,7 +22708,7 @@
                           <a:latin typeface="Yu Gothic"/>
                           <a:ea typeface="Yu Gothic"/>
                         </a:rPr>
-                        <a:t>作成数制限なし(数量に応じた許諾対価が別途必要)</a:t>
+                        <a:t>なし(他IPとの併用が可能)</a:t>
                       </a:r>
                     </a:p>
                   </a:txBody>
@@ -22733,7 +22733,7 @@
                           <a:latin typeface="Yu Gothic"/>
                           <a:ea typeface="Yu Gothic"/>
                         </a:rPr>
-                        <a:t>他コンテンツ制限</a:t>
+                        <a:t>着ぐるみ活用</a:t>
                       </a:r>
                     </a:p>
                   </a:txBody>
@@ -22749,14 +22749,14 @@
                     <a:lstStyle/>
                     <a:p>
                       <a:r>
-                        <a:rPr sz="1150" b="0">
-                          <a:solidFill>
-                            <a:srgbClr val="21252B"/>
-                          </a:solidFill>
-                          <a:latin typeface="Yu Gothic"/>
-                          <a:ea typeface="Yu Gothic"/>
-                        </a:rPr>
-                        <a:t>なし(他IPとの併用が可能)</a:t>
+                        <a:rPr sz="1150" b="1">
+                          <a:solidFill>
+                            <a:srgbClr val="21252B"/>
+                          </a:solidFill>
+                          <a:latin typeface="Yu Gothic"/>
+                          <a:ea typeface="Yu Gothic"/>
+                        </a:rPr>
+                        <a:t>FY26 3月まで</a:t>
                       </a:r>
                     </a:p>
                   </a:txBody>
@@ -22781,7 +22781,7 @@
                           <a:latin typeface="Yu Gothic"/>
                           <a:ea typeface="Yu Gothic"/>
                         </a:rPr>
-                        <a:t>着ぐるみ利用</a:t>
+                        <a:t>FY27以降</a:t>
                       </a:r>
                     </a:p>
                   </a:txBody>
@@ -22799,12 +22799,12 @@
                       <a:r>
                         <a:rPr sz="1150" b="1">
                           <a:solidFill>
-                            <a:srgbClr val="21252B"/>
-                          </a:solidFill>
-                          <a:latin typeface="Yu Gothic"/>
-                          <a:ea typeface="Yu Gothic"/>
-                        </a:rPr>
-                        <a:t>FY26 3月まで</a:t>
+                            <a:srgbClr val="D60012"/>
+                          </a:solidFill>
+                          <a:latin typeface="Yu Gothic"/>
+                          <a:ea typeface="Yu Gothic"/>
+                        </a:rPr>
+                        <a:t>コンテンツ活用は継続予定。ただし着ぐるみ活用は終了</a:t>
                       </a:r>
                     </a:p>
                   </a:txBody>
@@ -22829,7 +22829,7 @@
                           <a:latin typeface="Yu Gothic"/>
                           <a:ea typeface="Yu Gothic"/>
                         </a:rPr>
-                        <a:t>FY27以降</a:t>
+                        <a:t>その他</a:t>
                       </a:r>
                     </a:p>
                   </a:txBody>
@@ -22845,68 +22845,20 @@
                     <a:lstStyle/>
                     <a:p>
                       <a:r>
-                        <a:rPr sz="1150" b="1">
-                          <a:solidFill>
-                            <a:srgbClr val="D60012"/>
-                          </a:solidFill>
-                          <a:latin typeface="Yu Gothic"/>
-                          <a:ea typeface="Yu Gothic"/>
-                        </a:rPr>
-                        <a:t>契約継続予定。ただし着ぐるみ利用不可</a:t>
+                        <a:rPr sz="1150" b="0">
+                          <a:solidFill>
+                            <a:srgbClr val="21252B"/>
+                          </a:solidFill>
+                          <a:latin typeface="Yu Gothic"/>
+                          <a:ea typeface="Yu Gothic"/>
+                        </a:rPr>
+                        <a:t>複数のキャラクターIP活用も並行してご検討中</a:t>
                       </a:r>
                     </a:p>
                   </a:txBody>
                   <a:tcPr anchor="ctr" marL="73152" marR="73152" marT="18288" marB="18288">
                     <a:solidFill>
                       <a:srgbClr val="FFFFFF"/>
-                    </a:solidFill>
-                  </a:tcPr>
-                </a:tc>
-              </a:tr>
-              <a:tr h="384048">
-                <a:tc>
-                  <a:txBody>
-                    <a:bodyPr/>
-                    <a:lstStyle/>
-                    <a:p>
-                      <a:r>
-                        <a:rPr sz="1150" b="0">
-                          <a:solidFill>
-                            <a:srgbClr val="21252B"/>
-                          </a:solidFill>
-                          <a:latin typeface="Yu Gothic"/>
-                          <a:ea typeface="Yu Gothic"/>
-                        </a:rPr>
-                        <a:t>他IP検討状況</a:t>
-                      </a:r>
-                    </a:p>
-                  </a:txBody>
-                  <a:tcPr anchor="ctr" marL="73152" marR="73152" marT="18288" marB="18288">
-                    <a:solidFill>
-                      <a:srgbClr val="F2F4F6"/>
-                    </a:solidFill>
-                  </a:tcPr>
-                </a:tc>
-                <a:tc>
-                  <a:txBody>
-                    <a:bodyPr/>
-                    <a:lstStyle/>
-                    <a:p>
-                      <a:r>
-                        <a:rPr sz="1150" b="0">
-                          <a:solidFill>
-                            <a:srgbClr val="21252B"/>
-                          </a:solidFill>
-                          <a:latin typeface="Yu Gothic"/>
-                          <a:ea typeface="Yu Gothic"/>
-                        </a:rPr>
-                        <a:t>ちいかわ、すみっコぐらし、サンリオにアプローチ中</a:t>
-                      </a:r>
-                    </a:p>
-                  </a:txBody>
-                  <a:tcPr anchor="ctr" marL="73152" marR="73152" marT="18288" marB="18288">
-                    <a:solidFill>
-                      <a:srgbClr val="F2F4F6"/>
                     </a:solidFill>
                   </a:tcPr>
                 </a:tc>
@@ -23011,7 +22963,7 @@
                 <a:latin typeface="Yu Gothic"/>
                 <a:ea typeface="Yu Gothic"/>
               </a:rPr>
-              <a:t>① ポケモンはBB・でんき・既存コンテンツで継続すべき</a:t>
+              <a:t>① 現行IPはBB・でんき・既存コンテンツで継続活用が有効</a:t>
             </a:r>
           </a:p>
           <a:p>
@@ -23367,7 +23319,7 @@
                 <a:latin typeface="Yu Gothic"/>
                 <a:ea typeface="Yu Gothic"/>
               </a:rPr>
-              <a:t>現行ポケモン契約はFY27以降も継続</a:t>
+              <a:t>現行IPのコンテンツ活用はFY27以降も継続</a:t>
             </a:r>
           </a:p>
         </p:txBody>
@@ -23886,7 +23838,7 @@
                 <a:latin typeface="Yu Gothic"/>
                 <a:ea typeface="Yu Gothic"/>
               </a:rPr>
-              <a:t>ポケモンを置き換えるのではなく、FY27以降担いにくくなる“リアルイベント集客機能”をウルトラマンで補完する。</a:t>
+              <a:t>現行IPを置き換えるのではなく、FY27以降担いにくくなる“リアルイベント集客機能”をウルトラマンで補完する。</a:t>
             </a:r>
           </a:p>
         </p:txBody>
@@ -24241,7 +24193,7 @@
                           <a:latin typeface="Yu Gothic"/>
                           <a:ea typeface="Yu Gothic"/>
                         </a:rPr>
-                        <a:t>ポケモン</a:t>
+                        <a:t>現行キャラクターIP</a:t>
                       </a:r>
                     </a:p>
                   </a:txBody>
@@ -24264,7 +24216,7 @@
                           <a:latin typeface="Yu Gothic"/>
                           <a:ea typeface="Yu Gothic"/>
                         </a:rPr>
-                        <a:t>BB・でんき・既存コンテンツで継続活用(FY27以降も契約継続)</a:t>
+                        <a:t>BB・でんき・既存コンテンツで継続活用(FY27以降も活用継続)</a:t>
                       </a:r>
                     </a:p>
                   </a:txBody>
@@ -24289,7 +24241,7 @@
                           <a:latin typeface="Yu Gothic"/>
                           <a:ea typeface="Yu Gothic"/>
                         </a:rPr>
-                        <a:t>ちいかわ/すみっコぐらし/サンリオ</a:t>
+                        <a:t>かわいい系キャラクターIP(並行ご検討中)</a:t>
                       </a:r>
                     </a:p>
                   </a:txBody>
@@ -24312,7 +24264,7 @@
                           <a:latin typeface="Yu Gothic"/>
                           <a:ea typeface="Yu Gothic"/>
                         </a:rPr>
-                        <a:t>かわいい系、SNS拡散、女性・低年齢層向け</a:t>
+                        <a:t>SNS拡散、女性・低年齢層向け</a:t>
                       </a:r>
                     </a:p>
                   </a:txBody>

--- a/docs/proposals/softbank-ultraman-caravan/SoftBank_Ultraman_未来防衛隊キャラバン_提案資料.pptx
+++ b/docs/proposals/softbank-ultraman-caravan/SoftBank_Ultraman_未来防衛隊キャラバン_提案資料.pptx
@@ -10881,7 +10881,7 @@
                 <a:latin typeface="Yu Gothic"/>
                 <a:ea typeface="Yu Gothic"/>
               </a:rPr>
-              <a:t>推奨はB案:FY27標準プラン(1億2,000万円)です</a:t>
+              <a:t>推奨はB案:FY27標準プラン(1億5,000万円)です</a:t>
             </a:r>
           </a:p>
         </p:txBody>
@@ -11259,7 +11259,7 @@
                           <a:latin typeface="Yu Gothic"/>
                           <a:ea typeface="Yu Gothic"/>
                         </a:rPr>
-                        <a:t>1億2,000万円</a:t>
+                        <a:t>1億5,000万円</a:t>
                       </a:r>
                     </a:p>
                   </a:txBody>
@@ -11897,7 +11897,7 @@
                 <a:latin typeface="Yu Gothic"/>
                 <a:ea typeface="Yu Gothic"/>
               </a:rPr>
-              <a:t>推奨は、FY27年度の年間活用を前提とした1.2億円プラン(B案)です。</a:t>
+              <a:t>推奨は、FY27年度の年間活用を前提とした1.5億円プラン(B案)です。</a:t>
             </a:r>
           </a:p>
         </p:txBody>
@@ -12055,7 +12055,7 @@
                 <a:latin typeface="Yu Gothic"/>
                 <a:ea typeface="Yu Gothic"/>
               </a:rPr>
-              <a:t>ご提案:A案3,500万円(短期検証)/B案1億2,000万円(FY27年間・推奨)/C案2億5,000万円(60周年大型展開)。</a:t>
+              <a:t>ご提案:A案3,500万円(短期検証)/B案1億5,000万円(FY27年間・推奨)/C案2億5,000万円(60周年大型展開)。</a:t>
             </a:r>
           </a:p>
         </p:txBody>
@@ -13444,7 +13444,7 @@
                 <a:latin typeface="Yu Gothic"/>
                 <a:ea typeface="Yu Gothic"/>
               </a:rPr>
-              <a:t>B案:FY27標準プラン|1億2,000万円(税別)【推奨】</a:t>
+              <a:t>B案:FY27標準プラン|1億5,000万円(税別)【推奨】</a:t>
             </a:r>
           </a:p>
         </p:txBody>
@@ -13720,7 +13720,7 @@
                           <a:latin typeface="Yu Gothic"/>
                           <a:ea typeface="Yu Gothic"/>
                         </a:rPr>
-                        <a:t>5,000万円</a:t>
+                        <a:t>8,000万円</a:t>
                       </a:r>
                     </a:p>
                   </a:txBody>
@@ -14296,7 +14296,7 @@
                           <a:latin typeface="Yu Gothic"/>
                           <a:ea typeface="Yu Gothic"/>
                         </a:rPr>
-                        <a:t>1億2,000万円</a:t>
+                        <a:t>1億5,000万円</a:t>
                       </a:r>
                     </a:p>
                   </a:txBody>
@@ -15166,7 +15166,7 @@
                 <a:latin typeface="Yu Gothic"/>
                 <a:ea typeface="Yu Gothic"/>
               </a:rPr>
-              <a:t>B案の1億2,000万円は、IP使用料だけの金額ではありません。年間の企画・制作・イベント運営・店舗送客までを含む、実行費一式の総額です。</a:t>
+              <a:t>B案の1億5,000万円は、IP使用料だけの金額ではありません。年間の企画・制作・イベント運営・店舗送客までを含む、実行費一式の総額です。</a:t>
             </a:r>
           </a:p>
         </p:txBody>
@@ -21050,7 +21050,7 @@
                           <a:latin typeface="Yu Gothic"/>
                           <a:ea typeface="Yu Gothic"/>
                         </a:rPr>
-                        <a:t>1億2,000万円 税別</a:t>
+                        <a:t>1億5,000万円 税別</a:t>
                       </a:r>
                     </a:p>
                   </a:txBody>

--- a/docs/proposals/softbank-ultraman-caravan/SoftBank_Ultraman_未来防衛隊キャラバン_提案資料.pptx
+++ b/docs/proposals/softbank-ultraman-caravan/SoftBank_Ultraman_未来防衛隊キャラバン_提案資料.pptx
@@ -12477,7 +12477,7 @@
                           <a:latin typeface="Yu Gothic"/>
                           <a:ea typeface="Yu Gothic"/>
                         </a:rPr>
-                        <a:t>商業施設イベントの小規模検証(FY26下期パイロット)</a:t>
+                        <a:t>商業施設イベントの小規模検証(FY27期首:2027年4月〜)</a:t>
                       </a:r>
                     </a:p>
                   </a:txBody>
@@ -12799,7 +12799,7 @@
                 <a:latin typeface="Yu Gothic"/>
                 <a:ea typeface="Yu Gothic"/>
               </a:rPr>
-              <a:t>A案パイロット(FY26下期)で反応を検証 → B案でFY27年間展開 → 成果に応じてC案へ拡張。</a:t>
+              <a:t>A案パイロット(FY27期首:2027年4月〜)で反応を検証 → B案で年間展開 → 成果に応じてC案(全国)へ拡張。</a:t>
             </a:r>
           </a:p>
         </p:txBody>
@@ -13569,7 +13569,7 @@
                 <a:latin typeface="Yu Gothic"/>
                 <a:ea typeface="Yu Gothic"/>
               </a:rPr>
-              <a:t>FY27本格展開前に、ウルトラマンを核にした商業施設送客の反応を検証(3〜4か月)</a:t>
+              <a:t>FY27期首(2027年4月〜)の3〜4か月で、ウルトラマンを核にした商業施設送客の反応を検証します</a:t>
             </a:r>
           </a:p>
         </p:txBody>
@@ -21132,7 +21132,7 @@
                 <a:latin typeface="Yu Gothic"/>
                 <a:ea typeface="Yu Gothic"/>
               </a:rPr>
-              <a:t>実施スケジュール案(FY26下期〜FY27本格展開)</a:t>
+              <a:t>実施スケジュール案(FY26下期=準備、FY27=実働)</a:t>
             </a:r>
           </a:p>
         </p:txBody>
@@ -21172,7 +21172,7 @@
                 <a:latin typeface="Yu Gothic"/>
                 <a:ea typeface="Yu Gothic"/>
               </a:rPr>
-              <a:t>2026年度下期にA案パイロットで検証し、2027年4月からFY27年間契約(B案)へ移行します</a:t>
+              <a:t>FY26下期は設計・準備に充て、ウルトラマンのIP利用・実働は2027年4月(FY27期首)から開始します</a:t>
             </a:r>
           </a:p>
         </p:txBody>
@@ -21311,7 +21311,7 @@
         </p:nvGraphicFramePr>
         <p:xfrm>
           <a:off x="640080" y="1554480"/>
-          <a:ext cx="10881359" cy="4389120"/>
+          <a:ext cx="10881359" cy="4023360"/>
         </p:xfrm>
         <a:graphic>
           <a:graphicData uri="http://schemas.openxmlformats.org/drawingml/2006/table">
@@ -21503,7 +21503,7 @@
                           <a:latin typeface="Yu Gothic"/>
                           <a:ea typeface="Yu Gothic"/>
                         </a:rPr>
-                        <a:t>円谷プロ条件確認・概算見積精査</a:t>
+                        <a:t>円谷プロ条件確認・概算見積精査・契約協議</a:t>
                       </a:r>
                     </a:p>
                   </a:txBody>
@@ -21551,7 +21551,7 @@
                           <a:latin typeface="Yu Gothic"/>
                           <a:ea typeface="Yu Gothic"/>
                         </a:rPr>
-                        <a:t>2026年11月〜12月</a:t>
+                        <a:t>2026年11月〜2027年3月</a:t>
                       </a:r>
                     </a:p>
                   </a:txBody>
@@ -21574,7 +21574,7 @@
                           <a:latin typeface="Yu Gothic"/>
                           <a:ea typeface="Yu Gothic"/>
                         </a:rPr>
-                        <a:t>A案パイロット設計、商業施設候補選定</a:t>
+                        <a:t>パイロット設計、商業施設候補の選定・調整、制作準備(IP実働前の準備期間)</a:t>
                       </a:r>
                     </a:p>
                   </a:txBody>
@@ -21597,7 +21597,7 @@
                           <a:latin typeface="Yu Gothic"/>
                           <a:ea typeface="Yu Gothic"/>
                         </a:rPr>
-                        <a:t>検証</a:t>
+                        <a:t>準備</a:t>
                       </a:r>
                     </a:p>
                   </a:txBody>
@@ -21615,14 +21615,14 @@
                     <a:lstStyle/>
                     <a:p>
                       <a:r>
-                        <a:rPr sz="1200" b="0">
-                          <a:solidFill>
-                            <a:srgbClr val="21252B"/>
-                          </a:solidFill>
-                          <a:latin typeface="Yu Gothic"/>
-                          <a:ea typeface="Yu Gothic"/>
-                        </a:rPr>
-                        <a:t>2027年1月〜3月</a:t>
+                        <a:rPr sz="1200" b="1">
+                          <a:solidFill>
+                            <a:srgbClr val="D60012"/>
+                          </a:solidFill>
+                          <a:latin typeface="Yu Gothic"/>
+                          <a:ea typeface="Yu Gothic"/>
+                        </a:rPr>
+                        <a:t>2027年4月</a:t>
                       </a:r>
                     </a:p>
                   </a:txBody>
@@ -21638,14 +21638,14 @@
                     <a:lstStyle/>
                     <a:p>
                       <a:r>
-                        <a:rPr sz="1200" b="0">
-                          <a:solidFill>
-                            <a:srgbClr val="21252B"/>
-                          </a:solidFill>
-                          <a:latin typeface="Yu Gothic"/>
-                          <a:ea typeface="Yu Gothic"/>
-                        </a:rPr>
-                        <a:t>小規模検証イベント実施(A案)</a:t>
+                        <a:rPr sz="1200" b="1">
+                          <a:solidFill>
+                            <a:srgbClr val="D60012"/>
+                          </a:solidFill>
+                          <a:latin typeface="Yu Gothic"/>
+                          <a:ea typeface="Yu Gothic"/>
+                        </a:rPr>
+                        <a:t>FY27契約開始 — ウルトラマンのIP利用・実働はここから</a:t>
                       </a:r>
                     </a:p>
                   </a:txBody>
@@ -21661,14 +21661,14 @@
                     <a:lstStyle/>
                     <a:p>
                       <a:r>
-                        <a:rPr sz="1200" b="0">
-                          <a:solidFill>
-                            <a:srgbClr val="21252B"/>
-                          </a:solidFill>
-                          <a:latin typeface="Yu Gothic"/>
-                          <a:ea typeface="Yu Gothic"/>
-                        </a:rPr>
-                        <a:t>検証</a:t>
+                        <a:rPr sz="1200" b="1">
+                          <a:solidFill>
+                            <a:srgbClr val="D60012"/>
+                          </a:solidFill>
+                          <a:latin typeface="Yu Gothic"/>
+                          <a:ea typeface="Yu Gothic"/>
+                        </a:rPr>
+                        <a:t>開始</a:t>
                       </a:r>
                     </a:p>
                   </a:txBody>
@@ -21686,14 +21686,14 @@
                     <a:lstStyle/>
                     <a:p>
                       <a:r>
-                        <a:rPr sz="1200" b="1">
-                          <a:solidFill>
-                            <a:srgbClr val="D60012"/>
-                          </a:solidFill>
-                          <a:latin typeface="Yu Gothic"/>
-                          <a:ea typeface="Yu Gothic"/>
-                        </a:rPr>
-                        <a:t>2027年4月</a:t>
+                        <a:rPr sz="1200" b="0">
+                          <a:solidFill>
+                            <a:srgbClr val="21252B"/>
+                          </a:solidFill>
+                          <a:latin typeface="Yu Gothic"/>
+                          <a:ea typeface="Yu Gothic"/>
+                        </a:rPr>
+                        <a:t>2027年4月〜6月</a:t>
                       </a:r>
                     </a:p>
                   </a:txBody>
@@ -21709,14 +21709,14 @@
                     <a:lstStyle/>
                     <a:p>
                       <a:r>
-                        <a:rPr sz="1200" b="1">
-                          <a:solidFill>
-                            <a:srgbClr val="D60012"/>
-                          </a:solidFill>
-                          <a:latin typeface="Yu Gothic"/>
-                          <a:ea typeface="Yu Gothic"/>
-                        </a:rPr>
-                        <a:t>FY27年間契約開始(B案)</a:t>
+                        <a:rPr sz="1200" b="0">
+                          <a:solidFill>
+                            <a:srgbClr val="21252B"/>
+                          </a:solidFill>
+                          <a:latin typeface="Yu Gothic"/>
+                          <a:ea typeface="Yu Gothic"/>
+                        </a:rPr>
+                        <a:t>先行2〜3施設で小規模検証(A案フェーズ)</a:t>
                       </a:r>
                     </a:p>
                   </a:txBody>
@@ -21732,14 +21732,14 @@
                     <a:lstStyle/>
                     <a:p>
                       <a:r>
-                        <a:rPr sz="1200" b="1">
-                          <a:solidFill>
-                            <a:srgbClr val="D60012"/>
-                          </a:solidFill>
-                          <a:latin typeface="Yu Gothic"/>
-                          <a:ea typeface="Yu Gothic"/>
-                        </a:rPr>
-                        <a:t>本展開</a:t>
+                        <a:rPr sz="1200" b="0">
+                          <a:solidFill>
+                            <a:srgbClr val="21252B"/>
+                          </a:solidFill>
+                          <a:latin typeface="Yu Gothic"/>
+                          <a:ea typeface="Yu Gothic"/>
+                        </a:rPr>
+                        <a:t>検証</a:t>
                       </a:r>
                     </a:p>
                   </a:txBody>
@@ -21764,7 +21764,7 @@
                           <a:latin typeface="Yu Gothic"/>
                           <a:ea typeface="Yu Gothic"/>
                         </a:rPr>
-                        <a:t>2027年5月〜6月</a:t>
+                        <a:t>2027年7月〜8月</a:t>
                       </a:r>
                     </a:p>
                   </a:txBody>
@@ -21787,7 +21787,7 @@
                           <a:latin typeface="Yu Gothic"/>
                           <a:ea typeface="Yu Gothic"/>
                         </a:rPr>
-                        <a:t>春〜初夏イベント展開</a:t>
+                        <a:t>検証を踏まえ10〜20施設へ拡大。屋内商業施設中心の夏休み施策</a:t>
                       </a:r>
                     </a:p>
                   </a:txBody>
@@ -21835,7 +21835,7 @@
                           <a:latin typeface="Yu Gothic"/>
                           <a:ea typeface="Yu Gothic"/>
                         </a:rPr>
-                        <a:t>2027年7月〜8月</a:t>
+                        <a:t>2027年9月〜11月</a:t>
                       </a:r>
                     </a:p>
                   </a:txBody>
@@ -21858,7 +21858,7 @@
                           <a:latin typeface="Yu Gothic"/>
                           <a:ea typeface="Yu Gothic"/>
                         </a:rPr>
-                        <a:t>屋内商業施設中心の夏休み施策</a:t>
+                        <a:t>秋のファミリー送客施策</a:t>
                       </a:r>
                     </a:p>
                   </a:txBody>
@@ -21906,7 +21906,7 @@
                           <a:latin typeface="Yu Gothic"/>
                           <a:ea typeface="Yu Gothic"/>
                         </a:rPr>
-                        <a:t>2027年9月〜11月</a:t>
+                        <a:t>2027年12月〜2028年1月</a:t>
                       </a:r>
                     </a:p>
                   </a:txBody>
@@ -21929,7 +21929,7 @@
                           <a:latin typeface="Yu Gothic"/>
                           <a:ea typeface="Yu Gothic"/>
                         </a:rPr>
-                        <a:t>秋のファミリー送客施策</a:t>
+                        <a:t>年末年始商業施設施策</a:t>
                       </a:r>
                     </a:p>
                   </a:txBody>
@@ -21977,7 +21977,7 @@
                           <a:latin typeface="Yu Gothic"/>
                           <a:ea typeface="Yu Gothic"/>
                         </a:rPr>
-                        <a:t>2027年12月〜2028年1月</a:t>
+                        <a:t>2028年2月〜3月</a:t>
                       </a:r>
                     </a:p>
                   </a:txBody>
@@ -22000,7 +22000,7 @@
                           <a:latin typeface="Yu Gothic"/>
                           <a:ea typeface="Yu Gothic"/>
                         </a:rPr>
-                        <a:t>年末年始商業施設施策</a:t>
+                        <a:t>新生活・春商戦連動</a:t>
                       </a:r>
                     </a:p>
                   </a:txBody>
@@ -22048,7 +22048,7 @@
                           <a:latin typeface="Yu Gothic"/>
                           <a:ea typeface="Yu Gothic"/>
                         </a:rPr>
-                        <a:t>2028年2月〜3月</a:t>
+                        <a:t>2028年4月〜</a:t>
                       </a:r>
                     </a:p>
                   </a:txBody>
@@ -22071,7 +22071,7 @@
                           <a:latin typeface="Yu Gothic"/>
                           <a:ea typeface="Yu Gothic"/>
                         </a:rPr>
-                        <a:t>新生活・春商戦連動</a:t>
+                        <a:t>初年度の成果を踏まえ、複数年契約・全国展開(C案)への移行を協議</a:t>
                       </a:r>
                     </a:p>
                   </a:txBody>
@@ -22094,84 +22094,13 @@
                           <a:latin typeface="Yu Gothic"/>
                           <a:ea typeface="Yu Gothic"/>
                         </a:rPr>
-                        <a:t>本展開</a:t>
+                        <a:t>拡張</a:t>
                       </a:r>
                     </a:p>
                   </a:txBody>
                   <a:tcPr anchor="ctr" marL="73152" marR="73152" marT="18288" marB="18288">
                     <a:solidFill>
                       <a:srgbClr val="F2F4F6"/>
-                    </a:solidFill>
-                  </a:tcPr>
-                </a:tc>
-              </a:tr>
-              <a:tr h="365760">
-                <a:tc>
-                  <a:txBody>
-                    <a:bodyPr/>
-                    <a:lstStyle/>
-                    <a:p>
-                      <a:r>
-                        <a:rPr sz="1200" b="0">
-                          <a:solidFill>
-                            <a:srgbClr val="21252B"/>
-                          </a:solidFill>
-                          <a:latin typeface="Yu Gothic"/>
-                          <a:ea typeface="Yu Gothic"/>
-                        </a:rPr>
-                        <a:t>2028年4月〜</a:t>
-                      </a:r>
-                    </a:p>
-                  </a:txBody>
-                  <a:tcPr anchor="ctr" marL="73152" marR="73152" marT="18288" marB="18288">
-                    <a:solidFill>
-                      <a:srgbClr val="FFFFFF"/>
-                    </a:solidFill>
-                  </a:tcPr>
-                </a:tc>
-                <a:tc>
-                  <a:txBody>
-                    <a:bodyPr/>
-                    <a:lstStyle/>
-                    <a:p>
-                      <a:r>
-                        <a:rPr sz="1200" b="0">
-                          <a:solidFill>
-                            <a:srgbClr val="21252B"/>
-                          </a:solidFill>
-                          <a:latin typeface="Yu Gothic"/>
-                          <a:ea typeface="Yu Gothic"/>
-                        </a:rPr>
-                        <a:t>初年度の成果を踏まえ、複数年契約・全国展開(C案)への移行を協議</a:t>
-                      </a:r>
-                    </a:p>
-                  </a:txBody>
-                  <a:tcPr anchor="ctr" marL="73152" marR="73152" marT="18288" marB="18288">
-                    <a:solidFill>
-                      <a:srgbClr val="FFFFFF"/>
-                    </a:solidFill>
-                  </a:tcPr>
-                </a:tc>
-                <a:tc>
-                  <a:txBody>
-                    <a:bodyPr/>
-                    <a:lstStyle/>
-                    <a:p>
-                      <a:r>
-                        <a:rPr sz="1200" b="0">
-                          <a:solidFill>
-                            <a:srgbClr val="21252B"/>
-                          </a:solidFill>
-                          <a:latin typeface="Yu Gothic"/>
-                          <a:ea typeface="Yu Gothic"/>
-                        </a:rPr>
-                        <a:t>拡張</a:t>
-                      </a:r>
-                    </a:p>
-                  </a:txBody>
-                  <a:tcPr anchor="ctr" marL="73152" marR="73152" marT="18288" marB="18288">
-                    <a:solidFill>
-                      <a:srgbClr val="FFFFFF"/>
                     </a:solidFill>
                   </a:tcPr>
                 </a:tc>
@@ -22180,6 +22109,46 @@
           </a:graphicData>
         </a:graphic>
       </p:graphicFrame>
+      <p:sp>
+        <p:nvSpPr>
+          <p:cNvPr id="9" name="TextBox 8"/>
+          <p:cNvSpPr txBox="1"/>
+          <p:nvPr/>
+        </p:nvSpPr>
+        <p:spPr>
+          <a:xfrm>
+            <a:off x="640080" y="5623560"/>
+            <a:ext cx="10881360" cy="457200"/>
+          </a:xfrm>
+          <a:prstGeom prst="rect">
+            <a:avLst/>
+          </a:prstGeom>
+          <a:noFill/>
+        </p:spPr>
+        <p:txBody>
+          <a:bodyPr wrap="square" anchor="t" lIns="0" rIns="0" tIns="0" bIns="0">
+            <a:spAutoFit/>
+          </a:bodyPr>
+          <a:lstStyle/>
+          <a:p>
+            <a:pPr algn="l">
+              <a:spcAft>
+                <a:spcPts val="600"/>
+              </a:spcAft>
+            </a:pPr>
+            <a:r>
+              <a:rPr sz="1100" b="0">
+                <a:solidFill>
+                  <a:srgbClr val="5A626B"/>
+                </a:solidFill>
+                <a:latin typeface="Yu Gothic"/>
+                <a:ea typeface="Yu Gothic"/>
+              </a:rPr>
+              <a:t>※現行IPの着ぐるみ活用がFY26年度末(2027年3月)まで可能なため、ウルトラマンの実働はFY27期首からの開始が最も効率的かつ空白なく接続できます。</a:t>
+            </a:r>
+          </a:p>
+        </p:txBody>
+      </p:sp>
     </p:spTree>
   </p:cSld>
   <p:clrMapOvr>
@@ -24163,7 +24132,7 @@
                 <a:latin typeface="Yu Gothic"/>
                 <a:ea typeface="Yu Gothic"/>
               </a:rPr>
-              <a:t>方向性ご合意のうえ、円谷プロ側への条件打診と概算見積の精査(2026年9月〜10月)、A案パイロットの設計(2026年11月〜)に着手します。</a:t>
+              <a:t>方向性ご合意のうえ、円谷プロ側への条件打診と概算見積の精査(2026年9月〜10月)、パイロット設計・施設選定(2026年11月〜)に着手し、2027年4月の実働開始に備えます。</a:t>
             </a:r>
           </a:p>
         </p:txBody>

--- a/docs/proposals/softbank-ultraman-caravan/SoftBank_Ultraman_未来防衛隊キャラバン_提案資料.pptx
+++ b/docs/proposals/softbank-ultraman-caravan/SoftBank_Ultraman_未来防衛隊キャラバン_提案資料.pptx
@@ -37,6 +37,10 @@
     <p:sldId id="285" r:id="rId36"/>
     <p:sldId id="286" r:id="rId37"/>
     <p:sldId id="287" r:id="rId38"/>
+    <p:sldId id="288" r:id="rId39"/>
+    <p:sldId id="289" r:id="rId40"/>
+    <p:sldId id="290" r:id="rId41"/>
+    <p:sldId id="291" r:id="rId42"/>
   </p:sldIdLst>
   <p:sldSz cx="12191695" cy="6858000" type="screen4x3"/>
   <p:notesSz cx="6858000" cy="9144000"/>
@@ -24047,6 +24051,3034 @@
                 <a:ea typeface="Meiryo"/>
               </a:rPr>
               <a:t>32</a:t>
+            </a:r>
+          </a:p>
+        </p:txBody>
+      </p:sp>
+    </p:spTree>
+  </p:cSld>
+  <p:clrMapOvr>
+    <a:masterClrMapping/>
+  </p:clrMapOvr>
+</p:sld>
+</file>
+
+<file path=ppt/slides/slide33.xml><?xml version="1.0" encoding="utf-8"?>
+<p:sld xmlns:a="http://schemas.openxmlformats.org/drawingml/2006/main" xmlns:p="http://schemas.openxmlformats.org/presentationml/2006/main" xmlns:r="http://schemas.openxmlformats.org/officeDocument/2006/relationships">
+  <p:cSld>
+    <p:spTree>
+      <p:nvGrpSpPr>
+        <p:cNvPr id="1" name=""/>
+        <p:cNvGrpSpPr/>
+        <p:nvPr/>
+      </p:nvGrpSpPr>
+      <p:grpSpPr/>
+      <p:pic>
+        <p:nvPicPr>
+          <p:cNvPr id="2" name="Picture 1" descr="band_header.png"/>
+          <p:cNvPicPr>
+            <a:picLocks noChangeAspect="1"/>
+          </p:cNvPicPr>
+          <p:nvPr/>
+        </p:nvPicPr>
+        <p:blipFill>
+          <a:blip r:embed="rId2"/>
+          <a:stretch>
+            <a:fillRect/>
+          </a:stretch>
+        </p:blipFill>
+        <p:spPr>
+          <a:xfrm>
+            <a:off x="0" y="0"/>
+            <a:ext cx="12191695" cy="960120"/>
+          </a:xfrm>
+          <a:prstGeom prst="rect">
+            <a:avLst/>
+          </a:prstGeom>
+        </p:spPr>
+      </p:pic>
+      <p:sp>
+        <p:nvSpPr>
+          <p:cNvPr id="3" name="TextBox 2"/>
+          <p:cNvSpPr txBox="1"/>
+          <p:nvPr/>
+        </p:nvSpPr>
+        <p:spPr>
+          <a:xfrm>
+            <a:off x="457200" y="164592"/>
+            <a:ext cx="10058400" cy="640080"/>
+          </a:xfrm>
+          <a:prstGeom prst="rect">
+            <a:avLst/>
+          </a:prstGeom>
+          <a:noFill/>
+        </p:spPr>
+        <p:txBody>
+          <a:bodyPr wrap="square" anchor="ctr" lIns="0" rIns="0" tIns="0" bIns="0">
+            <a:spAutoFit/>
+          </a:bodyPr>
+          <a:lstStyle/>
+          <a:p>
+            <a:pPr algn="l">
+              <a:spcAft>
+                <a:spcPts val="600"/>
+              </a:spcAft>
+            </a:pPr>
+            <a:r>
+              <a:rPr sz="1500" b="1">
+                <a:solidFill>
+                  <a:srgbClr val="FFFFFF"/>
+                </a:solidFill>
+                <a:latin typeface="Meiryo"/>
+                <a:ea typeface="Meiryo"/>
+              </a:rPr>
+              <a:t>APPENDIX</a:t>
+            </a:r>
+          </a:p>
+        </p:txBody>
+      </p:sp>
+      <p:sp>
+        <p:nvSpPr>
+          <p:cNvPr id="4" name="TextBox 3"/>
+          <p:cNvSpPr txBox="1"/>
+          <p:nvPr/>
+        </p:nvSpPr>
+        <p:spPr>
+          <a:xfrm>
+            <a:off x="822960" y="2697480"/>
+            <a:ext cx="10515600" cy="1097280"/>
+          </a:xfrm>
+          <a:prstGeom prst="rect">
+            <a:avLst/>
+          </a:prstGeom>
+          <a:noFill/>
+        </p:spPr>
+        <p:txBody>
+          <a:bodyPr wrap="square" anchor="t" lIns="0" rIns="0" tIns="0" bIns="0">
+            <a:spAutoFit/>
+          </a:bodyPr>
+          <a:lstStyle/>
+          <a:p>
+            <a:pPr algn="ctr">
+              <a:spcAft>
+                <a:spcPts val="600"/>
+              </a:spcAft>
+            </a:pPr>
+            <a:r>
+              <a:rPr sz="3400" b="1">
+                <a:solidFill>
+                  <a:srgbClr val="1A1A1A"/>
+                </a:solidFill>
+                <a:latin typeface="Meiryo"/>
+                <a:ea typeface="Meiryo"/>
+              </a:rPr>
+              <a:t>Appendix</a:t>
+            </a:r>
+          </a:p>
+        </p:txBody>
+      </p:sp>
+      <p:sp>
+        <p:nvSpPr>
+          <p:cNvPr id="5" name="TextBox 4"/>
+          <p:cNvSpPr txBox="1"/>
+          <p:nvPr/>
+        </p:nvSpPr>
+        <p:spPr>
+          <a:xfrm>
+            <a:off x="1371600" y="3931920"/>
+            <a:ext cx="9418320" cy="1280160"/>
+          </a:xfrm>
+          <a:prstGeom prst="rect">
+            <a:avLst/>
+          </a:prstGeom>
+          <a:noFill/>
+        </p:spPr>
+        <p:txBody>
+          <a:bodyPr wrap="square" anchor="t" lIns="0" rIns="0" tIns="0" bIns="0">
+            <a:spAutoFit/>
+          </a:bodyPr>
+          <a:lstStyle/>
+          <a:p>
+            <a:pPr algn="ctr">
+              <a:spcAft>
+                <a:spcPts val="600"/>
+              </a:spcAft>
+            </a:pPr>
+            <a:r>
+              <a:rPr sz="1400" b="0">
+                <a:solidFill>
+                  <a:srgbClr val="5A626B"/>
+                </a:solidFill>
+                <a:latin typeface="Meiryo"/>
+                <a:ea typeface="Meiryo"/>
+              </a:rPr>
+              <a:t>KPI設定の積算根拠・前提条件・投資対効果の考え方</a:t>
+            </a:r>
+          </a:p>
+        </p:txBody>
+      </p:sp>
+      <p:sp>
+        <p:nvSpPr>
+          <p:cNvPr id="6" name="TextBox 5"/>
+          <p:cNvSpPr txBox="1"/>
+          <p:nvPr/>
+        </p:nvSpPr>
+        <p:spPr>
+          <a:xfrm>
+            <a:off x="4727448" y="6547104"/>
+            <a:ext cx="2743200" cy="256032"/>
+          </a:xfrm>
+          <a:prstGeom prst="rect">
+            <a:avLst/>
+          </a:prstGeom>
+          <a:noFill/>
+        </p:spPr>
+        <p:txBody>
+          <a:bodyPr wrap="square" anchor="t" lIns="0" rIns="0" tIns="0" bIns="0">
+            <a:spAutoFit/>
+          </a:bodyPr>
+          <a:lstStyle/>
+          <a:p>
+            <a:pPr algn="ctr">
+              <a:spcAft>
+                <a:spcPts val="600"/>
+              </a:spcAft>
+            </a:pPr>
+            <a:r>
+              <a:rPr sz="800" b="0">
+                <a:solidFill>
+                  <a:srgbClr val="8E949B"/>
+                </a:solidFill>
+                <a:latin typeface="Meiryo"/>
+                <a:ea typeface="Meiryo"/>
+              </a:rPr>
+              <a:t>© TSUBURAYA PRODUCTIONS</a:t>
+            </a:r>
+          </a:p>
+        </p:txBody>
+      </p:sp>
+      <p:sp>
+        <p:nvSpPr>
+          <p:cNvPr id="7" name="TextBox 6"/>
+          <p:cNvSpPr txBox="1"/>
+          <p:nvPr/>
+        </p:nvSpPr>
+        <p:spPr>
+          <a:xfrm>
+            <a:off x="9372600" y="6492240"/>
+            <a:ext cx="2011680" cy="274320"/>
+          </a:xfrm>
+          <a:prstGeom prst="rect">
+            <a:avLst/>
+          </a:prstGeom>
+          <a:noFill/>
+        </p:spPr>
+        <p:txBody>
+          <a:bodyPr wrap="square" anchor="t" lIns="0" rIns="0" tIns="0" bIns="0">
+            <a:spAutoFit/>
+          </a:bodyPr>
+          <a:lstStyle/>
+          <a:p>
+            <a:pPr algn="r">
+              <a:spcAft>
+                <a:spcPts val="600"/>
+              </a:spcAft>
+            </a:pPr>
+            <a:r>
+              <a:rPr sz="1000" b="1">
+                <a:solidFill>
+                  <a:srgbClr val="C00000"/>
+                </a:solidFill>
+                <a:latin typeface="Meiryo"/>
+                <a:ea typeface="Meiryo"/>
+              </a:rPr>
+              <a:t>Strictly Confidential</a:t>
+            </a:r>
+          </a:p>
+        </p:txBody>
+      </p:sp>
+      <p:sp>
+        <p:nvSpPr>
+          <p:cNvPr id="8" name="TextBox 7"/>
+          <p:cNvSpPr txBox="1"/>
+          <p:nvPr/>
+        </p:nvSpPr>
+        <p:spPr>
+          <a:xfrm>
+            <a:off x="11521440" y="6492240"/>
+            <a:ext cx="457200" cy="274320"/>
+          </a:xfrm>
+          <a:prstGeom prst="rect">
+            <a:avLst/>
+          </a:prstGeom>
+          <a:noFill/>
+        </p:spPr>
+        <p:txBody>
+          <a:bodyPr wrap="square" anchor="t" lIns="0" rIns="0" tIns="0" bIns="0">
+            <a:spAutoFit/>
+          </a:bodyPr>
+          <a:lstStyle/>
+          <a:p>
+            <a:pPr algn="r">
+              <a:spcAft>
+                <a:spcPts val="600"/>
+              </a:spcAft>
+            </a:pPr>
+            <a:r>
+              <a:rPr sz="1000" b="0">
+                <a:solidFill>
+                  <a:srgbClr val="8E949B"/>
+                </a:solidFill>
+                <a:latin typeface="Meiryo"/>
+                <a:ea typeface="Meiryo"/>
+              </a:rPr>
+              <a:t>33</a:t>
+            </a:r>
+          </a:p>
+        </p:txBody>
+      </p:sp>
+    </p:spTree>
+  </p:cSld>
+  <p:clrMapOvr>
+    <a:masterClrMapping/>
+  </p:clrMapOvr>
+</p:sld>
+</file>
+
+<file path=ppt/slides/slide34.xml><?xml version="1.0" encoding="utf-8"?>
+<p:sld xmlns:a="http://schemas.openxmlformats.org/drawingml/2006/main" xmlns:p="http://schemas.openxmlformats.org/presentationml/2006/main" xmlns:r="http://schemas.openxmlformats.org/officeDocument/2006/relationships">
+  <p:cSld>
+    <p:spTree>
+      <p:nvGrpSpPr>
+        <p:cNvPr id="1" name=""/>
+        <p:cNvGrpSpPr/>
+        <p:nvPr/>
+      </p:nvGrpSpPr>
+      <p:grpSpPr/>
+      <p:pic>
+        <p:nvPicPr>
+          <p:cNvPr id="2" name="Picture 1" descr="band_header.png"/>
+          <p:cNvPicPr>
+            <a:picLocks noChangeAspect="1"/>
+          </p:cNvPicPr>
+          <p:nvPr/>
+        </p:nvPicPr>
+        <p:blipFill>
+          <a:blip r:embed="rId2"/>
+          <a:stretch>
+            <a:fillRect/>
+          </a:stretch>
+        </p:blipFill>
+        <p:spPr>
+          <a:xfrm>
+            <a:off x="0" y="0"/>
+            <a:ext cx="12191695" cy="786384"/>
+          </a:xfrm>
+          <a:prstGeom prst="rect">
+            <a:avLst/>
+          </a:prstGeom>
+        </p:spPr>
+      </p:pic>
+      <p:sp>
+        <p:nvSpPr>
+          <p:cNvPr id="3" name="TextBox 2"/>
+          <p:cNvSpPr txBox="1"/>
+          <p:nvPr/>
+        </p:nvSpPr>
+        <p:spPr>
+          <a:xfrm>
+            <a:off x="457200" y="73152"/>
+            <a:ext cx="10241280" cy="640080"/>
+          </a:xfrm>
+          <a:prstGeom prst="rect">
+            <a:avLst/>
+          </a:prstGeom>
+          <a:noFill/>
+        </p:spPr>
+        <p:txBody>
+          <a:bodyPr wrap="square" anchor="ctr" lIns="0" rIns="0" tIns="0" bIns="0">
+            <a:spAutoFit/>
+          </a:bodyPr>
+          <a:lstStyle/>
+          <a:p>
+            <a:pPr algn="l">
+              <a:spcAft>
+                <a:spcPts val="600"/>
+              </a:spcAft>
+            </a:pPr>
+            <a:r>
+              <a:rPr sz="2100" b="1">
+                <a:solidFill>
+                  <a:srgbClr val="FFFFFF"/>
+                </a:solidFill>
+                <a:latin typeface="Meiryo"/>
+                <a:ea typeface="Meiryo"/>
+              </a:rPr>
+              <a:t>Appendix①:KPI積算根拠 — 年間KPIの「1開催日あたり」分解(B案)</a:t>
+            </a:r>
+          </a:p>
+        </p:txBody>
+      </p:sp>
+      <p:sp>
+        <p:nvSpPr>
+          <p:cNvPr id="4" name="TextBox 3"/>
+          <p:cNvSpPr txBox="1"/>
+          <p:nvPr/>
+        </p:nvSpPr>
+        <p:spPr>
+          <a:xfrm>
+            <a:off x="502920" y="896112"/>
+            <a:ext cx="11155680" cy="365760"/>
+          </a:xfrm>
+          <a:prstGeom prst="rect">
+            <a:avLst/>
+          </a:prstGeom>
+          <a:noFill/>
+        </p:spPr>
+        <p:txBody>
+          <a:bodyPr wrap="square" anchor="t" lIns="0" rIns="0" tIns="0" bIns="0">
+            <a:spAutoFit/>
+          </a:bodyPr>
+          <a:lstStyle/>
+          <a:p>
+            <a:pPr algn="l">
+              <a:spcAft>
+                <a:spcPts val="600"/>
+              </a:spcAft>
+            </a:pPr>
+            <a:r>
+              <a:rPr sz="1250" b="0">
+                <a:solidFill>
+                  <a:srgbClr val="5A626B"/>
+                </a:solidFill>
+                <a:latin typeface="Meiryo"/>
+                <a:ea typeface="Meiryo"/>
+              </a:rPr>
+              <a:t>年間80〜160開催日(10〜20施設×週末1〜2回)で分解し、モール型キャラクターイベントの運用実勢と突合しています</a:t>
+            </a:r>
+          </a:p>
+        </p:txBody>
+      </p:sp>
+      <p:sp>
+        <p:nvSpPr>
+          <p:cNvPr id="5" name="TextBox 4"/>
+          <p:cNvSpPr txBox="1"/>
+          <p:nvPr/>
+        </p:nvSpPr>
+        <p:spPr>
+          <a:xfrm>
+            <a:off x="4727448" y="6547104"/>
+            <a:ext cx="2743200" cy="256032"/>
+          </a:xfrm>
+          <a:prstGeom prst="rect">
+            <a:avLst/>
+          </a:prstGeom>
+          <a:noFill/>
+        </p:spPr>
+        <p:txBody>
+          <a:bodyPr wrap="square" anchor="t" lIns="0" rIns="0" tIns="0" bIns="0">
+            <a:spAutoFit/>
+          </a:bodyPr>
+          <a:lstStyle/>
+          <a:p>
+            <a:pPr algn="ctr">
+              <a:spcAft>
+                <a:spcPts val="600"/>
+              </a:spcAft>
+            </a:pPr>
+            <a:r>
+              <a:rPr sz="800" b="0">
+                <a:solidFill>
+                  <a:srgbClr val="8E949B"/>
+                </a:solidFill>
+                <a:latin typeface="Meiryo"/>
+                <a:ea typeface="Meiryo"/>
+              </a:rPr>
+              <a:t>© TSUBURAYA PRODUCTIONS</a:t>
+            </a:r>
+          </a:p>
+        </p:txBody>
+      </p:sp>
+      <p:sp>
+        <p:nvSpPr>
+          <p:cNvPr id="6" name="TextBox 5"/>
+          <p:cNvSpPr txBox="1"/>
+          <p:nvPr/>
+        </p:nvSpPr>
+        <p:spPr>
+          <a:xfrm>
+            <a:off x="9372600" y="6492240"/>
+            <a:ext cx="2011680" cy="274320"/>
+          </a:xfrm>
+          <a:prstGeom prst="rect">
+            <a:avLst/>
+          </a:prstGeom>
+          <a:noFill/>
+        </p:spPr>
+        <p:txBody>
+          <a:bodyPr wrap="square" anchor="t" lIns="0" rIns="0" tIns="0" bIns="0">
+            <a:spAutoFit/>
+          </a:bodyPr>
+          <a:lstStyle/>
+          <a:p>
+            <a:pPr algn="r">
+              <a:spcAft>
+                <a:spcPts val="600"/>
+              </a:spcAft>
+            </a:pPr>
+            <a:r>
+              <a:rPr sz="1000" b="1">
+                <a:solidFill>
+                  <a:srgbClr val="C00000"/>
+                </a:solidFill>
+                <a:latin typeface="Meiryo"/>
+                <a:ea typeface="Meiryo"/>
+              </a:rPr>
+              <a:t>Strictly Confidential</a:t>
+            </a:r>
+          </a:p>
+        </p:txBody>
+      </p:sp>
+      <p:sp>
+        <p:nvSpPr>
+          <p:cNvPr id="7" name="TextBox 6"/>
+          <p:cNvSpPr txBox="1"/>
+          <p:nvPr/>
+        </p:nvSpPr>
+        <p:spPr>
+          <a:xfrm>
+            <a:off x="11521440" y="6492240"/>
+            <a:ext cx="457200" cy="274320"/>
+          </a:xfrm>
+          <a:prstGeom prst="rect">
+            <a:avLst/>
+          </a:prstGeom>
+          <a:noFill/>
+        </p:spPr>
+        <p:txBody>
+          <a:bodyPr wrap="square" anchor="t" lIns="0" rIns="0" tIns="0" bIns="0">
+            <a:spAutoFit/>
+          </a:bodyPr>
+          <a:lstStyle/>
+          <a:p>
+            <a:pPr algn="r">
+              <a:spcAft>
+                <a:spcPts val="600"/>
+              </a:spcAft>
+            </a:pPr>
+            <a:r>
+              <a:rPr sz="1000" b="0">
+                <a:solidFill>
+                  <a:srgbClr val="8E949B"/>
+                </a:solidFill>
+                <a:latin typeface="Meiryo"/>
+                <a:ea typeface="Meiryo"/>
+              </a:rPr>
+              <a:t>34</a:t>
+            </a:r>
+          </a:p>
+        </p:txBody>
+      </p:sp>
+      <p:graphicFrame>
+        <p:nvGraphicFramePr>
+          <p:cNvPr id="8" name="Table 7"/>
+          <p:cNvGraphicFramePr>
+            <a:graphicFrameLocks noGrp="1"/>
+          </p:cNvGraphicFramePr>
+          <p:nvPr/>
+        </p:nvGraphicFramePr>
+        <p:xfrm>
+          <a:off x="640080" y="1463040"/>
+          <a:ext cx="10881359" cy="4023360"/>
+        </p:xfrm>
+        <a:graphic>
+          <a:graphicData uri="http://schemas.openxmlformats.org/drawingml/2006/table">
+            <a:tbl>
+              <a:tblPr firstRow="1" bandRow="1">
+                <a:tableStyleId>{5C22544A-7EE6-4342-B048-85BDC9FD1C3A}</a:tableStyleId>
+              </a:tblPr>
+              <a:tblGrid>
+                <a:gridCol w="2780791"/>
+                <a:gridCol w="1813560"/>
+                <a:gridCol w="6287008"/>
+              </a:tblGrid>
+              <a:tr h="502920">
+                <a:tc>
+                  <a:txBody>
+                    <a:bodyPr/>
+                    <a:lstStyle/>
+                    <a:p>
+                      <a:r>
+                        <a:rPr sz="1150" b="1">
+                          <a:solidFill>
+                            <a:srgbClr val="FFFFFF"/>
+                          </a:solidFill>
+                          <a:latin typeface="Meiryo"/>
+                          <a:ea typeface="Meiryo"/>
+                        </a:rPr>
+                        <a:t>KPI(B案・年間)</a:t>
+                      </a:r>
+                    </a:p>
+                  </a:txBody>
+                  <a:tcPr anchor="ctr" marL="73152" marR="73152" marT="18288" marB="18288">
+                    <a:solidFill>
+                      <a:srgbClr val="232278"/>
+                    </a:solidFill>
+                  </a:tcPr>
+                </a:tc>
+                <a:tc>
+                  <a:txBody>
+                    <a:bodyPr/>
+                    <a:lstStyle/>
+                    <a:p>
+                      <a:r>
+                        <a:rPr sz="1150" b="1">
+                          <a:solidFill>
+                            <a:srgbClr val="FFFFFF"/>
+                          </a:solidFill>
+                          <a:latin typeface="Meiryo"/>
+                          <a:ea typeface="Meiryo"/>
+                        </a:rPr>
+                        <a:t>1開催日あたり</a:t>
+                      </a:r>
+                    </a:p>
+                  </a:txBody>
+                  <a:tcPr anchor="ctr" marL="73152" marR="73152" marT="18288" marB="18288">
+                    <a:solidFill>
+                      <a:srgbClr val="232278"/>
+                    </a:solidFill>
+                  </a:tcPr>
+                </a:tc>
+                <a:tc>
+                  <a:txBody>
+                    <a:bodyPr/>
+                    <a:lstStyle/>
+                    <a:p>
+                      <a:r>
+                        <a:rPr sz="1150" b="1">
+                          <a:solidFill>
+                            <a:srgbClr val="FFFFFF"/>
+                          </a:solidFill>
+                          <a:latin typeface="Meiryo"/>
+                          <a:ea typeface="Meiryo"/>
+                        </a:rPr>
+                        <a:t>実勢・設計上の裏付け</a:t>
+                      </a:r>
+                    </a:p>
+                  </a:txBody>
+                  <a:tcPr anchor="ctr" marL="73152" marR="73152" marT="18288" marB="18288">
+                    <a:solidFill>
+                      <a:srgbClr val="232278"/>
+                    </a:solidFill>
+                  </a:tcPr>
+                </a:tc>
+              </a:tr>
+              <a:tr h="502920">
+                <a:tc>
+                  <a:txBody>
+                    <a:bodyPr/>
+                    <a:lstStyle/>
+                    <a:p>
+                      <a:r>
+                        <a:rPr sz="1100" b="0">
+                          <a:solidFill>
+                            <a:srgbClr val="1A1A1A"/>
+                          </a:solidFill>
+                          <a:latin typeface="Meiryo"/>
+                          <a:ea typeface="Meiryo"/>
+                        </a:rPr>
+                        <a:t>総イベント来場 3万〜8万人</a:t>
+                      </a:r>
+                    </a:p>
+                  </a:txBody>
+                  <a:tcPr anchor="ctr" marL="73152" marR="73152" marT="18288" marB="18288">
+                    <a:solidFill>
+                      <a:srgbClr val="FFFFFF"/>
+                    </a:solidFill>
+                  </a:tcPr>
+                </a:tc>
+                <a:tc>
+                  <a:txBody>
+                    <a:bodyPr/>
+                    <a:lstStyle/>
+                    <a:p>
+                      <a:r>
+                        <a:rPr sz="1100" b="0">
+                          <a:solidFill>
+                            <a:srgbClr val="1A1A1A"/>
+                          </a:solidFill>
+                          <a:latin typeface="Meiryo"/>
+                          <a:ea typeface="Meiryo"/>
+                        </a:rPr>
+                        <a:t>約190〜1,000人/日</a:t>
+                      </a:r>
+                    </a:p>
+                  </a:txBody>
+                  <a:tcPr anchor="ctr" marL="73152" marR="73152" marT="18288" marB="18288">
+                    <a:solidFill>
+                      <a:srgbClr val="FFFFFF"/>
+                    </a:solidFill>
+                  </a:tcPr>
+                </a:tc>
+                <a:tc>
+                  <a:txBody>
+                    <a:bodyPr/>
+                    <a:lstStyle/>
+                    <a:p>
+                      <a:r>
+                        <a:rPr sz="1100" b="0">
+                          <a:solidFill>
+                            <a:srgbClr val="1A1A1A"/>
+                          </a:solidFill>
+                          <a:latin typeface="Meiryo"/>
+                          <a:ea typeface="Meiryo"/>
+                        </a:rPr>
+                        <a:t>モール型ショーの標準運用(30分ステージ+撮影会を1日2回、1回200〜400人観覧)で1日400〜800人が実勢</a:t>
+                      </a:r>
+                    </a:p>
+                  </a:txBody>
+                  <a:tcPr anchor="ctr" marL="73152" marR="73152" marT="18288" marB="18288">
+                    <a:solidFill>
+                      <a:srgbClr val="FFFFFF"/>
+                    </a:solidFill>
+                  </a:tcPr>
+                </a:tc>
+              </a:tr>
+              <a:tr h="502920">
+                <a:tc>
+                  <a:txBody>
+                    <a:bodyPr/>
+                    <a:lstStyle/>
+                    <a:p>
+                      <a:r>
+                        <a:rPr sz="1100" b="0">
+                          <a:solidFill>
+                            <a:srgbClr val="1A1A1A"/>
+                          </a:solidFill>
+                          <a:latin typeface="Meiryo"/>
+                          <a:ea typeface="Meiryo"/>
+                        </a:rPr>
+                        <a:t>撮影会参加 3,000〜8,000組</a:t>
+                      </a:r>
+                    </a:p>
+                  </a:txBody>
+                  <a:tcPr anchor="ctr" marL="73152" marR="73152" marT="18288" marB="18288">
+                    <a:solidFill>
+                      <a:srgbClr val="F2F4F6"/>
+                    </a:solidFill>
+                  </a:tcPr>
+                </a:tc>
+                <a:tc>
+                  <a:txBody>
+                    <a:bodyPr/>
+                    <a:lstStyle/>
+                    <a:p>
+                      <a:r>
+                        <a:rPr sz="1100" b="0">
+                          <a:solidFill>
+                            <a:srgbClr val="1A1A1A"/>
+                          </a:solidFill>
+                          <a:latin typeface="Meiryo"/>
+                          <a:ea typeface="Meiryo"/>
+                        </a:rPr>
+                        <a:t>約19〜100組/日</a:t>
+                      </a:r>
+                    </a:p>
+                  </a:txBody>
+                  <a:tcPr anchor="ctr" marL="73152" marR="73152" marT="18288" marB="18288">
+                    <a:solidFill>
+                      <a:srgbClr val="F2F4F6"/>
+                    </a:solidFill>
+                  </a:tcPr>
+                </a:tc>
+                <a:tc>
+                  <a:txBody>
+                    <a:bodyPr/>
+                    <a:lstStyle/>
+                    <a:p>
+                      <a:r>
+                        <a:rPr sz="1100" b="0">
+                          <a:solidFill>
+                            <a:srgbClr val="1A1A1A"/>
+                          </a:solidFill>
+                          <a:latin typeface="Meiryo"/>
+                          <a:ea typeface="Meiryo"/>
+                        </a:rPr>
+                        <a:t>撮影会は1回あたり20〜90組の入場制限運用が一般的。1日1〜2回で最大180組</a:t>
+                      </a:r>
+                    </a:p>
+                  </a:txBody>
+                  <a:tcPr anchor="ctr" marL="73152" marR="73152" marT="18288" marB="18288">
+                    <a:solidFill>
+                      <a:srgbClr val="F2F4F6"/>
+                    </a:solidFill>
+                  </a:tcPr>
+                </a:tc>
+              </a:tr>
+              <a:tr h="502920">
+                <a:tc>
+                  <a:txBody>
+                    <a:bodyPr/>
+                    <a:lstStyle/>
+                    <a:p>
+                      <a:r>
+                        <a:rPr sz="1100" b="0">
+                          <a:solidFill>
+                            <a:srgbClr val="1A1A1A"/>
+                          </a:solidFill>
+                          <a:latin typeface="Meiryo"/>
+                          <a:ea typeface="Meiryo"/>
+                        </a:rPr>
+                        <a:t>館内ラリー参加 1万〜3万人</a:t>
+                      </a:r>
+                    </a:p>
+                  </a:txBody>
+                  <a:tcPr anchor="ctr" marL="73152" marR="73152" marT="18288" marB="18288">
+                    <a:solidFill>
+                      <a:srgbClr val="FFFFFF"/>
+                    </a:solidFill>
+                  </a:tcPr>
+                </a:tc>
+                <a:tc>
+                  <a:txBody>
+                    <a:bodyPr/>
+                    <a:lstStyle/>
+                    <a:p>
+                      <a:r>
+                        <a:rPr sz="1100" b="0">
+                          <a:solidFill>
+                            <a:srgbClr val="1A1A1A"/>
+                          </a:solidFill>
+                          <a:latin typeface="Meiryo"/>
+                          <a:ea typeface="Meiryo"/>
+                        </a:rPr>
+                        <a:t>約63〜375人/日</a:t>
+                      </a:r>
+                    </a:p>
+                  </a:txBody>
+                  <a:tcPr anchor="ctr" marL="73152" marR="73152" marT="18288" marB="18288">
+                    <a:solidFill>
+                      <a:srgbClr val="FFFFFF"/>
+                    </a:solidFill>
+                  </a:tcPr>
+                </a:tc>
+                <a:tc>
+                  <a:txBody>
+                    <a:bodyPr/>
+                    <a:lstStyle/>
+                    <a:p>
+                      <a:r>
+                        <a:rPr sz="1100" b="0">
+                          <a:solidFill>
+                            <a:srgbClr val="1A1A1A"/>
+                          </a:solidFill>
+                          <a:latin typeface="Meiryo"/>
+                          <a:ea typeface="Meiryo"/>
+                        </a:rPr>
+                        <a:t>来場者の33〜38%と設定(ファミリー主体の参加型企画の設計目標値)</a:t>
+                      </a:r>
+                    </a:p>
+                  </a:txBody>
+                  <a:tcPr anchor="ctr" marL="73152" marR="73152" marT="18288" marB="18288">
+                    <a:solidFill>
+                      <a:srgbClr val="FFFFFF"/>
+                    </a:solidFill>
+                  </a:tcPr>
+                </a:tc>
+              </a:tr>
+              <a:tr h="502920">
+                <a:tc>
+                  <a:txBody>
+                    <a:bodyPr/>
+                    <a:lstStyle/>
+                    <a:p>
+                      <a:r>
+                        <a:rPr sz="1100" b="0">
+                          <a:solidFill>
+                            <a:srgbClr val="1A1A1A"/>
+                          </a:solidFill>
+                          <a:latin typeface="Meiryo"/>
+                          <a:ea typeface="Meiryo"/>
+                        </a:rPr>
+                        <a:t>デジタル隊員証 8,000〜2万人</a:t>
+                      </a:r>
+                    </a:p>
+                  </a:txBody>
+                  <a:tcPr anchor="ctr" marL="73152" marR="73152" marT="18288" marB="18288">
+                    <a:solidFill>
+                      <a:srgbClr val="F2F4F6"/>
+                    </a:solidFill>
+                  </a:tcPr>
+                </a:tc>
+                <a:tc>
+                  <a:txBody>
+                    <a:bodyPr/>
+                    <a:lstStyle/>
+                    <a:p>
+                      <a:r>
+                        <a:rPr sz="1100" b="0">
+                          <a:solidFill>
+                            <a:srgbClr val="1A1A1A"/>
+                          </a:solidFill>
+                          <a:latin typeface="Meiryo"/>
+                          <a:ea typeface="Meiryo"/>
+                        </a:rPr>
+                        <a:t>—</a:t>
+                      </a:r>
+                    </a:p>
+                  </a:txBody>
+                  <a:tcPr anchor="ctr" marL="73152" marR="73152" marT="18288" marB="18288">
+                    <a:solidFill>
+                      <a:srgbClr val="F2F4F6"/>
+                    </a:solidFill>
+                  </a:tcPr>
+                </a:tc>
+                <a:tc>
+                  <a:txBody>
+                    <a:bodyPr/>
+                    <a:lstStyle/>
+                    <a:p>
+                      <a:r>
+                        <a:rPr sz="1100" b="0">
+                          <a:solidFill>
+                            <a:srgbClr val="1A1A1A"/>
+                          </a:solidFill>
+                          <a:latin typeface="Meiryo"/>
+                          <a:ea typeface="Meiryo"/>
+                        </a:rPr>
+                        <a:t>ラリー動線に発行ミッションを組込(ラリー参加者の67〜80%)</a:t>
+                      </a:r>
+                    </a:p>
+                  </a:txBody>
+                  <a:tcPr anchor="ctr" marL="73152" marR="73152" marT="18288" marB="18288">
+                    <a:solidFill>
+                      <a:srgbClr val="F2F4F6"/>
+                    </a:solidFill>
+                  </a:tcPr>
+                </a:tc>
+              </a:tr>
+              <a:tr h="502920">
+                <a:tc>
+                  <a:txBody>
+                    <a:bodyPr/>
+                    <a:lstStyle/>
+                    <a:p>
+                      <a:r>
+                        <a:rPr sz="1100" b="0">
+                          <a:solidFill>
+                            <a:srgbClr val="1A1A1A"/>
+                          </a:solidFill>
+                          <a:latin typeface="Meiryo"/>
+                          <a:ea typeface="Meiryo"/>
+                        </a:rPr>
+                        <a:t>ショップ送客 3,000〜8,000人</a:t>
+                      </a:r>
+                    </a:p>
+                  </a:txBody>
+                  <a:tcPr anchor="ctr" marL="73152" marR="73152" marT="18288" marB="18288">
+                    <a:solidFill>
+                      <a:srgbClr val="FFFFFF"/>
+                    </a:solidFill>
+                  </a:tcPr>
+                </a:tc>
+                <a:tc>
+                  <a:txBody>
+                    <a:bodyPr/>
+                    <a:lstStyle/>
+                    <a:p>
+                      <a:r>
+                        <a:rPr sz="1100" b="0">
+                          <a:solidFill>
+                            <a:srgbClr val="1A1A1A"/>
+                          </a:solidFill>
+                          <a:latin typeface="Meiryo"/>
+                          <a:ea typeface="Meiryo"/>
+                        </a:rPr>
+                        <a:t>約19〜100人/日</a:t>
+                      </a:r>
+                    </a:p>
+                  </a:txBody>
+                  <a:tcPr anchor="ctr" marL="73152" marR="73152" marT="18288" marB="18288">
+                    <a:solidFill>
+                      <a:srgbClr val="FFFFFF"/>
+                    </a:solidFill>
+                  </a:tcPr>
+                </a:tc>
+                <a:tc>
+                  <a:txBody>
+                    <a:bodyPr/>
+                    <a:lstStyle/>
+                    <a:p>
+                      <a:r>
+                        <a:rPr sz="1100" b="0">
+                          <a:solidFill>
+                            <a:srgbClr val="1A1A1A"/>
+                          </a:solidFill>
+                          <a:latin typeface="Meiryo"/>
+                          <a:ea typeface="Meiryo"/>
+                        </a:rPr>
+                        <a:t>「ショップ基地=最終ミッション」設計。ラリー完走率約3割と設定</a:t>
+                      </a:r>
+                    </a:p>
+                  </a:txBody>
+                  <a:tcPr anchor="ctr" marL="73152" marR="73152" marT="18288" marB="18288">
+                    <a:solidFill>
+                      <a:srgbClr val="FFFFFF"/>
+                    </a:solidFill>
+                  </a:tcPr>
+                </a:tc>
+              </a:tr>
+              <a:tr h="502920">
+                <a:tc>
+                  <a:txBody>
+                    <a:bodyPr/>
+                    <a:lstStyle/>
+                    <a:p>
+                      <a:r>
+                        <a:rPr sz="1100" b="0">
+                          <a:solidFill>
+                            <a:srgbClr val="1A1A1A"/>
+                          </a:solidFill>
+                          <a:latin typeface="Meiryo"/>
+                          <a:ea typeface="Meiryo"/>
+                        </a:rPr>
+                        <a:t>相談 1,000〜3,000件</a:t>
+                      </a:r>
+                    </a:p>
+                  </a:txBody>
+                  <a:tcPr anchor="ctr" marL="73152" marR="73152" marT="18288" marB="18288">
+                    <a:solidFill>
+                      <a:srgbClr val="F2F4F6"/>
+                    </a:solidFill>
+                  </a:tcPr>
+                </a:tc>
+                <a:tc>
+                  <a:txBody>
+                    <a:bodyPr/>
+                    <a:lstStyle/>
+                    <a:p>
+                      <a:r>
+                        <a:rPr sz="1100" b="0">
+                          <a:solidFill>
+                            <a:srgbClr val="1A1A1A"/>
+                          </a:solidFill>
+                          <a:latin typeface="Meiryo"/>
+                          <a:ea typeface="Meiryo"/>
+                        </a:rPr>
+                        <a:t>約6〜38件/日</a:t>
+                      </a:r>
+                    </a:p>
+                  </a:txBody>
+                  <a:tcPr anchor="ctr" marL="73152" marR="73152" marT="18288" marB="18288">
+                    <a:solidFill>
+                      <a:srgbClr val="F2F4F6"/>
+                    </a:solidFill>
+                  </a:tcPr>
+                </a:tc>
+                <a:tc>
+                  <a:txBody>
+                    <a:bodyPr/>
+                    <a:lstStyle/>
+                    <a:p>
+                      <a:r>
+                        <a:rPr sz="1100" b="0">
+                          <a:solidFill>
+                            <a:srgbClr val="1A1A1A"/>
+                          </a:solidFill>
+                          <a:latin typeface="Meiryo"/>
+                          <a:ea typeface="Meiryo"/>
+                        </a:rPr>
+                        <a:t>店舗の相談キャパシティ(3〜4卓×30分×8時間=約50〜60件/日)の範囲内で設定</a:t>
+                      </a:r>
+                    </a:p>
+                  </a:txBody>
+                  <a:tcPr anchor="ctr" marL="73152" marR="73152" marT="18288" marB="18288">
+                    <a:solidFill>
+                      <a:srgbClr val="F2F4F6"/>
+                    </a:solidFill>
+                  </a:tcPr>
+                </a:tc>
+              </a:tr>
+              <a:tr h="502920">
+                <a:tc>
+                  <a:txBody>
+                    <a:bodyPr/>
+                    <a:lstStyle/>
+                    <a:p>
+                      <a:r>
+                        <a:rPr sz="1100" b="0">
+                          <a:solidFill>
+                            <a:srgbClr val="1A1A1A"/>
+                          </a:solidFill>
+                          <a:latin typeface="Meiryo"/>
+                          <a:ea typeface="Meiryo"/>
+                        </a:rPr>
+                        <a:t>見積・来店予約 500〜1,500件</a:t>
+                      </a:r>
+                    </a:p>
+                  </a:txBody>
+                  <a:tcPr anchor="ctr" marL="73152" marR="73152" marT="18288" marB="18288">
+                    <a:solidFill>
+                      <a:srgbClr val="FFFFFF"/>
+                    </a:solidFill>
+                  </a:tcPr>
+                </a:tc>
+                <a:tc>
+                  <a:txBody>
+                    <a:bodyPr/>
+                    <a:lstStyle/>
+                    <a:p>
+                      <a:r>
+                        <a:rPr sz="1100" b="0">
+                          <a:solidFill>
+                            <a:srgbClr val="1A1A1A"/>
+                          </a:solidFill>
+                          <a:latin typeface="Meiryo"/>
+                          <a:ea typeface="Meiryo"/>
+                        </a:rPr>
+                        <a:t>—</a:t>
+                      </a:r>
+                    </a:p>
+                  </a:txBody>
+                  <a:tcPr anchor="ctr" marL="73152" marR="73152" marT="18288" marB="18288">
+                    <a:solidFill>
+                      <a:srgbClr val="FFFFFF"/>
+                    </a:solidFill>
+                  </a:tcPr>
+                </a:tc>
+                <a:tc>
+                  <a:txBody>
+                    <a:bodyPr/>
+                    <a:lstStyle/>
+                    <a:p>
+                      <a:r>
+                        <a:rPr sz="1100" b="0">
+                          <a:solidFill>
+                            <a:srgbClr val="1A1A1A"/>
+                          </a:solidFill>
+                          <a:latin typeface="Meiryo"/>
+                          <a:ea typeface="Meiryo"/>
+                        </a:rPr>
+                        <a:t>相談からの見積化率5割と設定(店頭相談の一般水準3〜5割の上限側)</a:t>
+                      </a:r>
+                    </a:p>
+                  </a:txBody>
+                  <a:tcPr anchor="ctr" marL="73152" marR="73152" marT="18288" marB="18288">
+                    <a:solidFill>
+                      <a:srgbClr val="FFFFFF"/>
+                    </a:solidFill>
+                  </a:tcPr>
+                </a:tc>
+              </a:tr>
+            </a:tbl>
+          </a:graphicData>
+        </a:graphic>
+      </p:graphicFrame>
+      <p:sp>
+        <p:nvSpPr>
+          <p:cNvPr id="9" name="TextBox 8"/>
+          <p:cNvSpPr txBox="1"/>
+          <p:nvPr/>
+        </p:nvSpPr>
+        <p:spPr>
+          <a:xfrm>
+            <a:off x="640080" y="5623560"/>
+            <a:ext cx="10881360" cy="548640"/>
+          </a:xfrm>
+          <a:prstGeom prst="rect">
+            <a:avLst/>
+          </a:prstGeom>
+          <a:noFill/>
+        </p:spPr>
+        <p:txBody>
+          <a:bodyPr wrap="square" anchor="t" lIns="0" rIns="0" tIns="0" bIns="0">
+            <a:spAutoFit/>
+          </a:bodyPr>
+          <a:lstStyle/>
+          <a:p>
+            <a:pPr algn="l">
+              <a:spcAft>
+                <a:spcPts val="600"/>
+              </a:spcAft>
+            </a:pPr>
+            <a:r>
+              <a:rPr sz="1050" b="0">
+                <a:solidFill>
+                  <a:srgbClr val="5A626B"/>
+                </a:solidFill>
+                <a:latin typeface="Meiryo"/>
+                <a:ea typeface="Meiryo"/>
+              </a:rPr>
+              <a:t>※公開されているモール型キャラクターイベントの運用実勢、および店舗オペレーションの設計値に基づく積算です。転換率はFY27期首の検証フェーズで実測し、年間KPIを精緻化します。</a:t>
+            </a:r>
+          </a:p>
+        </p:txBody>
+      </p:sp>
+    </p:spTree>
+  </p:cSld>
+  <p:clrMapOvr>
+    <a:masterClrMapping/>
+  </p:clrMapOvr>
+</p:sld>
+</file>
+
+<file path=ppt/slides/slide35.xml><?xml version="1.0" encoding="utf-8"?>
+<p:sld xmlns:a="http://schemas.openxmlformats.org/drawingml/2006/main" xmlns:p="http://schemas.openxmlformats.org/presentationml/2006/main" xmlns:r="http://schemas.openxmlformats.org/officeDocument/2006/relationships">
+  <p:cSld>
+    <p:spTree>
+      <p:nvGrpSpPr>
+        <p:cNvPr id="1" name=""/>
+        <p:cNvGrpSpPr/>
+        <p:nvPr/>
+      </p:nvGrpSpPr>
+      <p:grpSpPr/>
+      <p:pic>
+        <p:nvPicPr>
+          <p:cNvPr id="2" name="Picture 1" descr="band_header.png"/>
+          <p:cNvPicPr>
+            <a:picLocks noChangeAspect="1"/>
+          </p:cNvPicPr>
+          <p:nvPr/>
+        </p:nvPicPr>
+        <p:blipFill>
+          <a:blip r:embed="rId2"/>
+          <a:stretch>
+            <a:fillRect/>
+          </a:stretch>
+        </p:blipFill>
+        <p:spPr>
+          <a:xfrm>
+            <a:off x="0" y="0"/>
+            <a:ext cx="12191695" cy="786384"/>
+          </a:xfrm>
+          <a:prstGeom prst="rect">
+            <a:avLst/>
+          </a:prstGeom>
+        </p:spPr>
+      </p:pic>
+      <p:sp>
+        <p:nvSpPr>
+          <p:cNvPr id="3" name="TextBox 2"/>
+          <p:cNvSpPr txBox="1"/>
+          <p:nvPr/>
+        </p:nvSpPr>
+        <p:spPr>
+          <a:xfrm>
+            <a:off x="457200" y="73152"/>
+            <a:ext cx="10241280" cy="640080"/>
+          </a:xfrm>
+          <a:prstGeom prst="rect">
+            <a:avLst/>
+          </a:prstGeom>
+          <a:noFill/>
+        </p:spPr>
+        <p:txBody>
+          <a:bodyPr wrap="square" anchor="ctr" lIns="0" rIns="0" tIns="0" bIns="0">
+            <a:spAutoFit/>
+          </a:bodyPr>
+          <a:lstStyle/>
+          <a:p>
+            <a:pPr algn="l">
+              <a:spcAft>
+                <a:spcPts val="600"/>
+              </a:spcAft>
+            </a:pPr>
+            <a:r>
+              <a:rPr sz="2100" b="1">
+                <a:solidFill>
+                  <a:srgbClr val="FFFFFF"/>
+                </a:solidFill>
+                <a:latin typeface="Meiryo"/>
+                <a:ea typeface="Meiryo"/>
+              </a:rPr>
+              <a:t>Appendix②:KPIツリーと下限・上限の定義</a:t>
+            </a:r>
+          </a:p>
+        </p:txBody>
+      </p:sp>
+      <p:sp>
+        <p:nvSpPr>
+          <p:cNvPr id="4" name="TextBox 3"/>
+          <p:cNvSpPr txBox="1"/>
+          <p:nvPr/>
+        </p:nvSpPr>
+        <p:spPr>
+          <a:xfrm>
+            <a:off x="502920" y="896112"/>
+            <a:ext cx="11155680" cy="365760"/>
+          </a:xfrm>
+          <a:prstGeom prst="rect">
+            <a:avLst/>
+          </a:prstGeom>
+          <a:noFill/>
+        </p:spPr>
+        <p:txBody>
+          <a:bodyPr wrap="square" anchor="t" lIns="0" rIns="0" tIns="0" bIns="0">
+            <a:spAutoFit/>
+          </a:bodyPr>
+          <a:lstStyle/>
+          <a:p>
+            <a:pPr algn="l">
+              <a:spcAft>
+                <a:spcPts val="600"/>
+              </a:spcAft>
+            </a:pPr>
+            <a:r>
+              <a:rPr sz="1250" b="0">
+                <a:solidFill>
+                  <a:srgbClr val="5A626B"/>
+                </a:solidFill>
+                <a:latin typeface="Meiryo"/>
+                <a:ea typeface="Meiryo"/>
+              </a:rPr>
+              <a:t>各KPIは転換率で連結したツリー構造です。下限は必達水準、上限はフル運用時のストレッチ水準として設定しています</a:t>
+            </a:r>
+          </a:p>
+        </p:txBody>
+      </p:sp>
+      <p:sp>
+        <p:nvSpPr>
+          <p:cNvPr id="5" name="TextBox 4"/>
+          <p:cNvSpPr txBox="1"/>
+          <p:nvPr/>
+        </p:nvSpPr>
+        <p:spPr>
+          <a:xfrm>
+            <a:off x="4727448" y="6547104"/>
+            <a:ext cx="2743200" cy="256032"/>
+          </a:xfrm>
+          <a:prstGeom prst="rect">
+            <a:avLst/>
+          </a:prstGeom>
+          <a:noFill/>
+        </p:spPr>
+        <p:txBody>
+          <a:bodyPr wrap="square" anchor="t" lIns="0" rIns="0" tIns="0" bIns="0">
+            <a:spAutoFit/>
+          </a:bodyPr>
+          <a:lstStyle/>
+          <a:p>
+            <a:pPr algn="ctr">
+              <a:spcAft>
+                <a:spcPts val="600"/>
+              </a:spcAft>
+            </a:pPr>
+            <a:r>
+              <a:rPr sz="800" b="0">
+                <a:solidFill>
+                  <a:srgbClr val="8E949B"/>
+                </a:solidFill>
+                <a:latin typeface="Meiryo"/>
+                <a:ea typeface="Meiryo"/>
+              </a:rPr>
+              <a:t>© TSUBURAYA PRODUCTIONS</a:t>
+            </a:r>
+          </a:p>
+        </p:txBody>
+      </p:sp>
+      <p:sp>
+        <p:nvSpPr>
+          <p:cNvPr id="6" name="TextBox 5"/>
+          <p:cNvSpPr txBox="1"/>
+          <p:nvPr/>
+        </p:nvSpPr>
+        <p:spPr>
+          <a:xfrm>
+            <a:off x="9372600" y="6492240"/>
+            <a:ext cx="2011680" cy="274320"/>
+          </a:xfrm>
+          <a:prstGeom prst="rect">
+            <a:avLst/>
+          </a:prstGeom>
+          <a:noFill/>
+        </p:spPr>
+        <p:txBody>
+          <a:bodyPr wrap="square" anchor="t" lIns="0" rIns="0" tIns="0" bIns="0">
+            <a:spAutoFit/>
+          </a:bodyPr>
+          <a:lstStyle/>
+          <a:p>
+            <a:pPr algn="r">
+              <a:spcAft>
+                <a:spcPts val="600"/>
+              </a:spcAft>
+            </a:pPr>
+            <a:r>
+              <a:rPr sz="1000" b="1">
+                <a:solidFill>
+                  <a:srgbClr val="C00000"/>
+                </a:solidFill>
+                <a:latin typeface="Meiryo"/>
+                <a:ea typeface="Meiryo"/>
+              </a:rPr>
+              <a:t>Strictly Confidential</a:t>
+            </a:r>
+          </a:p>
+        </p:txBody>
+      </p:sp>
+      <p:sp>
+        <p:nvSpPr>
+          <p:cNvPr id="7" name="TextBox 6"/>
+          <p:cNvSpPr txBox="1"/>
+          <p:nvPr/>
+        </p:nvSpPr>
+        <p:spPr>
+          <a:xfrm>
+            <a:off x="11521440" y="6492240"/>
+            <a:ext cx="457200" cy="274320"/>
+          </a:xfrm>
+          <a:prstGeom prst="rect">
+            <a:avLst/>
+          </a:prstGeom>
+          <a:noFill/>
+        </p:spPr>
+        <p:txBody>
+          <a:bodyPr wrap="square" anchor="t" lIns="0" rIns="0" tIns="0" bIns="0">
+            <a:spAutoFit/>
+          </a:bodyPr>
+          <a:lstStyle/>
+          <a:p>
+            <a:pPr algn="r">
+              <a:spcAft>
+                <a:spcPts val="600"/>
+              </a:spcAft>
+            </a:pPr>
+            <a:r>
+              <a:rPr sz="1000" b="0">
+                <a:solidFill>
+                  <a:srgbClr val="8E949B"/>
+                </a:solidFill>
+                <a:latin typeface="Meiryo"/>
+                <a:ea typeface="Meiryo"/>
+              </a:rPr>
+              <a:t>35</a:t>
+            </a:r>
+          </a:p>
+        </p:txBody>
+      </p:sp>
+      <p:sp>
+        <p:nvSpPr>
+          <p:cNvPr id="8" name="Rounded Rectangle 7"/>
+          <p:cNvSpPr/>
+          <p:nvPr/>
+        </p:nvSpPr>
+        <p:spPr>
+          <a:xfrm>
+            <a:off x="777240" y="1554480"/>
+            <a:ext cx="5669280" cy="457200"/>
+          </a:xfrm>
+          <a:prstGeom prst="roundRect">
+            <a:avLst>
+              <a:gd name="adj" fmla="val 16000"/>
+            </a:avLst>
+          </a:prstGeom>
+          <a:solidFill>
+            <a:srgbClr val="232278"/>
+          </a:solidFill>
+          <a:ln>
+            <a:noFill/>
+          </a:ln>
+          <a:effectLst/>
+        </p:spPr>
+        <p:style>
+          <a:lnRef idx="1">
+            <a:schemeClr val="accent1"/>
+          </a:lnRef>
+          <a:fillRef idx="3">
+            <a:schemeClr val="accent1"/>
+          </a:fillRef>
+          <a:effectRef idx="2">
+            <a:schemeClr val="accent1"/>
+          </a:effectRef>
+          <a:fontRef idx="minor">
+            <a:schemeClr val="lt1"/>
+          </a:fontRef>
+        </p:style>
+        <p:txBody>
+          <a:bodyPr rtlCol="0" anchor="ctr" wrap="square" tIns="18288" bIns="18288"/>
+          <a:lstStyle/>
+          <a:p>
+            <a:pPr algn="ctr"/>
+            <a:r>
+              <a:rPr sz="1200" b="1">
+                <a:solidFill>
+                  <a:srgbClr val="FFFFFF"/>
+                </a:solidFill>
+                <a:latin typeface="Meiryo"/>
+                <a:ea typeface="Meiryo"/>
+              </a:rPr>
+              <a:t>総イベント来場(100%)</a:t>
+            </a:r>
+          </a:p>
+        </p:txBody>
+      </p:sp>
+      <p:sp>
+        <p:nvSpPr>
+          <p:cNvPr id="9" name="Down Arrow 8"/>
+          <p:cNvSpPr/>
+          <p:nvPr/>
+        </p:nvSpPr>
+        <p:spPr>
+          <a:xfrm>
+            <a:off x="3529584" y="2025396"/>
+            <a:ext cx="164592" cy="128016"/>
+          </a:xfrm>
+          <a:prstGeom prst="downArrow">
+            <a:avLst/>
+          </a:prstGeom>
+          <a:solidFill>
+            <a:srgbClr val="C00000"/>
+          </a:solidFill>
+          <a:ln>
+            <a:noFill/>
+          </a:ln>
+          <a:effectLst/>
+        </p:spPr>
+        <p:style>
+          <a:lnRef idx="1">
+            <a:schemeClr val="accent1"/>
+          </a:lnRef>
+          <a:fillRef idx="3">
+            <a:schemeClr val="accent1"/>
+          </a:fillRef>
+          <a:effectRef idx="2">
+            <a:schemeClr val="accent1"/>
+          </a:effectRef>
+          <a:fontRef idx="minor">
+            <a:schemeClr val="lt1"/>
+          </a:fontRef>
+        </p:style>
+        <p:txBody>
+          <a:bodyPr rtlCol="0" anchor="ctr"/>
+          <a:lstStyle/>
+          <a:p>
+            <a:pPr algn="ctr"/>
+          </a:p>
+        </p:txBody>
+      </p:sp>
+      <p:sp>
+        <p:nvSpPr>
+          <p:cNvPr id="10" name="Rounded Rectangle 9"/>
+          <p:cNvSpPr/>
+          <p:nvPr/>
+        </p:nvSpPr>
+        <p:spPr>
+          <a:xfrm>
+            <a:off x="777240" y="2167128"/>
+            <a:ext cx="5669280" cy="457200"/>
+          </a:xfrm>
+          <a:prstGeom prst="roundRect">
+            <a:avLst>
+              <a:gd name="adj" fmla="val 16000"/>
+            </a:avLst>
+          </a:prstGeom>
+          <a:solidFill>
+            <a:srgbClr val="F2F4F6"/>
+          </a:solidFill>
+          <a:ln>
+            <a:noFill/>
+          </a:ln>
+          <a:effectLst/>
+        </p:spPr>
+        <p:style>
+          <a:lnRef idx="1">
+            <a:schemeClr val="accent1"/>
+          </a:lnRef>
+          <a:fillRef idx="3">
+            <a:schemeClr val="accent1"/>
+          </a:fillRef>
+          <a:effectRef idx="2">
+            <a:schemeClr val="accent1"/>
+          </a:effectRef>
+          <a:fontRef idx="minor">
+            <a:schemeClr val="lt1"/>
+          </a:fontRef>
+        </p:style>
+        <p:txBody>
+          <a:bodyPr rtlCol="0" anchor="ctr" wrap="square" tIns="18288" bIns="18288"/>
+          <a:lstStyle/>
+          <a:p>
+            <a:pPr algn="ctr"/>
+            <a:r>
+              <a:rPr sz="1200" b="0">
+                <a:solidFill>
+                  <a:srgbClr val="1A1A1A"/>
+                </a:solidFill>
+                <a:latin typeface="Meiryo"/>
+                <a:ea typeface="Meiryo"/>
+              </a:rPr>
+              <a:t>館内ラリー参加(来場の33〜38%)</a:t>
+            </a:r>
+          </a:p>
+        </p:txBody>
+      </p:sp>
+      <p:sp>
+        <p:nvSpPr>
+          <p:cNvPr id="11" name="Down Arrow 10"/>
+          <p:cNvSpPr/>
+          <p:nvPr/>
+        </p:nvSpPr>
+        <p:spPr>
+          <a:xfrm>
+            <a:off x="3529584" y="2638044"/>
+            <a:ext cx="164592" cy="128016"/>
+          </a:xfrm>
+          <a:prstGeom prst="downArrow">
+            <a:avLst/>
+          </a:prstGeom>
+          <a:solidFill>
+            <a:srgbClr val="C00000"/>
+          </a:solidFill>
+          <a:ln>
+            <a:noFill/>
+          </a:ln>
+          <a:effectLst/>
+        </p:spPr>
+        <p:style>
+          <a:lnRef idx="1">
+            <a:schemeClr val="accent1"/>
+          </a:lnRef>
+          <a:fillRef idx="3">
+            <a:schemeClr val="accent1"/>
+          </a:fillRef>
+          <a:effectRef idx="2">
+            <a:schemeClr val="accent1"/>
+          </a:effectRef>
+          <a:fontRef idx="minor">
+            <a:schemeClr val="lt1"/>
+          </a:fontRef>
+        </p:style>
+        <p:txBody>
+          <a:bodyPr rtlCol="0" anchor="ctr"/>
+          <a:lstStyle/>
+          <a:p>
+            <a:pPr algn="ctr"/>
+          </a:p>
+        </p:txBody>
+      </p:sp>
+      <p:sp>
+        <p:nvSpPr>
+          <p:cNvPr id="12" name="Rounded Rectangle 11"/>
+          <p:cNvSpPr/>
+          <p:nvPr/>
+        </p:nvSpPr>
+        <p:spPr>
+          <a:xfrm>
+            <a:off x="777240" y="2779776"/>
+            <a:ext cx="5669280" cy="457200"/>
+          </a:xfrm>
+          <a:prstGeom prst="roundRect">
+            <a:avLst>
+              <a:gd name="adj" fmla="val 16000"/>
+            </a:avLst>
+          </a:prstGeom>
+          <a:solidFill>
+            <a:srgbClr val="F2F4F6"/>
+          </a:solidFill>
+          <a:ln>
+            <a:noFill/>
+          </a:ln>
+          <a:effectLst/>
+        </p:spPr>
+        <p:style>
+          <a:lnRef idx="1">
+            <a:schemeClr val="accent1"/>
+          </a:lnRef>
+          <a:fillRef idx="3">
+            <a:schemeClr val="accent1"/>
+          </a:fillRef>
+          <a:effectRef idx="2">
+            <a:schemeClr val="accent1"/>
+          </a:effectRef>
+          <a:fontRef idx="minor">
+            <a:schemeClr val="lt1"/>
+          </a:fontRef>
+        </p:style>
+        <p:txBody>
+          <a:bodyPr rtlCol="0" anchor="ctr" wrap="square" tIns="18288" bIns="18288"/>
+          <a:lstStyle/>
+          <a:p>
+            <a:pPr algn="ctr"/>
+            <a:r>
+              <a:rPr sz="1200" b="0">
+                <a:solidFill>
+                  <a:srgbClr val="1A1A1A"/>
+                </a:solidFill>
+                <a:latin typeface="Meiryo"/>
+                <a:ea typeface="Meiryo"/>
+              </a:rPr>
+              <a:t>デジタル隊員証発行(参加の67〜80%)</a:t>
+            </a:r>
+          </a:p>
+        </p:txBody>
+      </p:sp>
+      <p:sp>
+        <p:nvSpPr>
+          <p:cNvPr id="13" name="Down Arrow 12"/>
+          <p:cNvSpPr/>
+          <p:nvPr/>
+        </p:nvSpPr>
+        <p:spPr>
+          <a:xfrm>
+            <a:off x="3529584" y="3250692"/>
+            <a:ext cx="164592" cy="128016"/>
+          </a:xfrm>
+          <a:prstGeom prst="downArrow">
+            <a:avLst/>
+          </a:prstGeom>
+          <a:solidFill>
+            <a:srgbClr val="C00000"/>
+          </a:solidFill>
+          <a:ln>
+            <a:noFill/>
+          </a:ln>
+          <a:effectLst/>
+        </p:spPr>
+        <p:style>
+          <a:lnRef idx="1">
+            <a:schemeClr val="accent1"/>
+          </a:lnRef>
+          <a:fillRef idx="3">
+            <a:schemeClr val="accent1"/>
+          </a:fillRef>
+          <a:effectRef idx="2">
+            <a:schemeClr val="accent1"/>
+          </a:effectRef>
+          <a:fontRef idx="minor">
+            <a:schemeClr val="lt1"/>
+          </a:fontRef>
+        </p:style>
+        <p:txBody>
+          <a:bodyPr rtlCol="0" anchor="ctr"/>
+          <a:lstStyle/>
+          <a:p>
+            <a:pPr algn="ctr"/>
+          </a:p>
+        </p:txBody>
+      </p:sp>
+      <p:sp>
+        <p:nvSpPr>
+          <p:cNvPr id="14" name="Rounded Rectangle 13"/>
+          <p:cNvSpPr/>
+          <p:nvPr/>
+        </p:nvSpPr>
+        <p:spPr>
+          <a:xfrm>
+            <a:off x="777240" y="3392424"/>
+            <a:ext cx="5669280" cy="457200"/>
+          </a:xfrm>
+          <a:prstGeom prst="roundRect">
+            <a:avLst>
+              <a:gd name="adj" fmla="val 16000"/>
+            </a:avLst>
+          </a:prstGeom>
+          <a:solidFill>
+            <a:srgbClr val="F2F4F6"/>
+          </a:solidFill>
+          <a:ln>
+            <a:noFill/>
+          </a:ln>
+          <a:effectLst/>
+        </p:spPr>
+        <p:style>
+          <a:lnRef idx="1">
+            <a:schemeClr val="accent1"/>
+          </a:lnRef>
+          <a:fillRef idx="3">
+            <a:schemeClr val="accent1"/>
+          </a:fillRef>
+          <a:effectRef idx="2">
+            <a:schemeClr val="accent1"/>
+          </a:effectRef>
+          <a:fontRef idx="minor">
+            <a:schemeClr val="lt1"/>
+          </a:fontRef>
+        </p:style>
+        <p:txBody>
+          <a:bodyPr rtlCol="0" anchor="ctr" wrap="square" tIns="18288" bIns="18288"/>
+          <a:lstStyle/>
+          <a:p>
+            <a:pPr algn="ctr"/>
+            <a:r>
+              <a:rPr sz="1200" b="0">
+                <a:solidFill>
+                  <a:srgbClr val="1A1A1A"/>
+                </a:solidFill>
+                <a:latin typeface="Meiryo"/>
+                <a:ea typeface="Meiryo"/>
+              </a:rPr>
+              <a:t>ショップ送客(ラリー完走 約3割)</a:t>
+            </a:r>
+          </a:p>
+        </p:txBody>
+      </p:sp>
+      <p:sp>
+        <p:nvSpPr>
+          <p:cNvPr id="15" name="Down Arrow 14"/>
+          <p:cNvSpPr/>
+          <p:nvPr/>
+        </p:nvSpPr>
+        <p:spPr>
+          <a:xfrm>
+            <a:off x="3529584" y="3863340"/>
+            <a:ext cx="164592" cy="128016"/>
+          </a:xfrm>
+          <a:prstGeom prst="downArrow">
+            <a:avLst/>
+          </a:prstGeom>
+          <a:solidFill>
+            <a:srgbClr val="C00000"/>
+          </a:solidFill>
+          <a:ln>
+            <a:noFill/>
+          </a:ln>
+          <a:effectLst/>
+        </p:spPr>
+        <p:style>
+          <a:lnRef idx="1">
+            <a:schemeClr val="accent1"/>
+          </a:lnRef>
+          <a:fillRef idx="3">
+            <a:schemeClr val="accent1"/>
+          </a:fillRef>
+          <a:effectRef idx="2">
+            <a:schemeClr val="accent1"/>
+          </a:effectRef>
+          <a:fontRef idx="minor">
+            <a:schemeClr val="lt1"/>
+          </a:fontRef>
+        </p:style>
+        <p:txBody>
+          <a:bodyPr rtlCol="0" anchor="ctr"/>
+          <a:lstStyle/>
+          <a:p>
+            <a:pPr algn="ctr"/>
+          </a:p>
+        </p:txBody>
+      </p:sp>
+      <p:sp>
+        <p:nvSpPr>
+          <p:cNvPr id="16" name="Rounded Rectangle 15"/>
+          <p:cNvSpPr/>
+          <p:nvPr/>
+        </p:nvSpPr>
+        <p:spPr>
+          <a:xfrm>
+            <a:off x="777240" y="4005072"/>
+            <a:ext cx="5669280" cy="457200"/>
+          </a:xfrm>
+          <a:prstGeom prst="roundRect">
+            <a:avLst>
+              <a:gd name="adj" fmla="val 16000"/>
+            </a:avLst>
+          </a:prstGeom>
+          <a:solidFill>
+            <a:srgbClr val="F2F4F6"/>
+          </a:solidFill>
+          <a:ln>
+            <a:noFill/>
+          </a:ln>
+          <a:effectLst/>
+        </p:spPr>
+        <p:style>
+          <a:lnRef idx="1">
+            <a:schemeClr val="accent1"/>
+          </a:lnRef>
+          <a:fillRef idx="3">
+            <a:schemeClr val="accent1"/>
+          </a:fillRef>
+          <a:effectRef idx="2">
+            <a:schemeClr val="accent1"/>
+          </a:effectRef>
+          <a:fontRef idx="minor">
+            <a:schemeClr val="lt1"/>
+          </a:fontRef>
+        </p:style>
+        <p:txBody>
+          <a:bodyPr rtlCol="0" anchor="ctr" wrap="square" tIns="18288" bIns="18288"/>
+          <a:lstStyle/>
+          <a:p>
+            <a:pPr algn="ctr"/>
+            <a:r>
+              <a:rPr sz="1200" b="0">
+                <a:solidFill>
+                  <a:srgbClr val="1A1A1A"/>
+                </a:solidFill>
+                <a:latin typeface="Meiryo"/>
+                <a:ea typeface="Meiryo"/>
+              </a:rPr>
+              <a:t>相談(送客の33〜37%)</a:t>
+            </a:r>
+          </a:p>
+        </p:txBody>
+      </p:sp>
+      <p:sp>
+        <p:nvSpPr>
+          <p:cNvPr id="17" name="Down Arrow 16"/>
+          <p:cNvSpPr/>
+          <p:nvPr/>
+        </p:nvSpPr>
+        <p:spPr>
+          <a:xfrm>
+            <a:off x="3529584" y="4475988"/>
+            <a:ext cx="164592" cy="128016"/>
+          </a:xfrm>
+          <a:prstGeom prst="downArrow">
+            <a:avLst/>
+          </a:prstGeom>
+          <a:solidFill>
+            <a:srgbClr val="C00000"/>
+          </a:solidFill>
+          <a:ln>
+            <a:noFill/>
+          </a:ln>
+          <a:effectLst/>
+        </p:spPr>
+        <p:style>
+          <a:lnRef idx="1">
+            <a:schemeClr val="accent1"/>
+          </a:lnRef>
+          <a:fillRef idx="3">
+            <a:schemeClr val="accent1"/>
+          </a:fillRef>
+          <a:effectRef idx="2">
+            <a:schemeClr val="accent1"/>
+          </a:effectRef>
+          <a:fontRef idx="minor">
+            <a:schemeClr val="lt1"/>
+          </a:fontRef>
+        </p:style>
+        <p:txBody>
+          <a:bodyPr rtlCol="0" anchor="ctr"/>
+          <a:lstStyle/>
+          <a:p>
+            <a:pPr algn="ctr"/>
+          </a:p>
+        </p:txBody>
+      </p:sp>
+      <p:sp>
+        <p:nvSpPr>
+          <p:cNvPr id="18" name="Rounded Rectangle 17"/>
+          <p:cNvSpPr/>
+          <p:nvPr/>
+        </p:nvSpPr>
+        <p:spPr>
+          <a:xfrm>
+            <a:off x="777240" y="4617720"/>
+            <a:ext cx="5669280" cy="457200"/>
+          </a:xfrm>
+          <a:prstGeom prst="roundRect">
+            <a:avLst>
+              <a:gd name="adj" fmla="val 16000"/>
+            </a:avLst>
+          </a:prstGeom>
+          <a:solidFill>
+            <a:srgbClr val="F2F4F6"/>
+          </a:solidFill>
+          <a:ln>
+            <a:noFill/>
+          </a:ln>
+          <a:effectLst/>
+        </p:spPr>
+        <p:style>
+          <a:lnRef idx="1">
+            <a:schemeClr val="accent1"/>
+          </a:lnRef>
+          <a:fillRef idx="3">
+            <a:schemeClr val="accent1"/>
+          </a:fillRef>
+          <a:effectRef idx="2">
+            <a:schemeClr val="accent1"/>
+          </a:effectRef>
+          <a:fontRef idx="minor">
+            <a:schemeClr val="lt1"/>
+          </a:fontRef>
+        </p:style>
+        <p:txBody>
+          <a:bodyPr rtlCol="0" anchor="ctr" wrap="square" tIns="18288" bIns="18288"/>
+          <a:lstStyle/>
+          <a:p>
+            <a:pPr algn="ctr"/>
+            <a:r>
+              <a:rPr sz="1200" b="0">
+                <a:solidFill>
+                  <a:srgbClr val="1A1A1A"/>
+                </a:solidFill>
+                <a:latin typeface="Meiryo"/>
+                <a:ea typeface="Meiryo"/>
+              </a:rPr>
+              <a:t>見積・来店予約(相談の約5割)</a:t>
+            </a:r>
+          </a:p>
+        </p:txBody>
+      </p:sp>
+      <p:sp>
+        <p:nvSpPr>
+          <p:cNvPr id="19" name="Down Arrow 18"/>
+          <p:cNvSpPr/>
+          <p:nvPr/>
+        </p:nvSpPr>
+        <p:spPr>
+          <a:xfrm>
+            <a:off x="3529584" y="5088636"/>
+            <a:ext cx="164592" cy="128016"/>
+          </a:xfrm>
+          <a:prstGeom prst="downArrow">
+            <a:avLst/>
+          </a:prstGeom>
+          <a:solidFill>
+            <a:srgbClr val="C00000"/>
+          </a:solidFill>
+          <a:ln>
+            <a:noFill/>
+          </a:ln>
+          <a:effectLst/>
+        </p:spPr>
+        <p:style>
+          <a:lnRef idx="1">
+            <a:schemeClr val="accent1"/>
+          </a:lnRef>
+          <a:fillRef idx="3">
+            <a:schemeClr val="accent1"/>
+          </a:fillRef>
+          <a:effectRef idx="2">
+            <a:schemeClr val="accent1"/>
+          </a:effectRef>
+          <a:fontRef idx="minor">
+            <a:schemeClr val="lt1"/>
+          </a:fontRef>
+        </p:style>
+        <p:txBody>
+          <a:bodyPr rtlCol="0" anchor="ctr"/>
+          <a:lstStyle/>
+          <a:p>
+            <a:pPr algn="ctr"/>
+          </a:p>
+        </p:txBody>
+      </p:sp>
+      <p:sp>
+        <p:nvSpPr>
+          <p:cNvPr id="20" name="Rounded Rectangle 19"/>
+          <p:cNvSpPr/>
+          <p:nvPr/>
+        </p:nvSpPr>
+        <p:spPr>
+          <a:xfrm>
+            <a:off x="777240" y="5230368"/>
+            <a:ext cx="5669280" cy="457200"/>
+          </a:xfrm>
+          <a:prstGeom prst="roundRect">
+            <a:avLst>
+              <a:gd name="adj" fmla="val 16000"/>
+            </a:avLst>
+          </a:prstGeom>
+          <a:solidFill>
+            <a:srgbClr val="C00000"/>
+          </a:solidFill>
+          <a:ln>
+            <a:noFill/>
+          </a:ln>
+          <a:effectLst/>
+        </p:spPr>
+        <p:style>
+          <a:lnRef idx="1">
+            <a:schemeClr val="accent1"/>
+          </a:lnRef>
+          <a:fillRef idx="3">
+            <a:schemeClr val="accent1"/>
+          </a:fillRef>
+          <a:effectRef idx="2">
+            <a:schemeClr val="accent1"/>
+          </a:effectRef>
+          <a:fontRef idx="minor">
+            <a:schemeClr val="lt1"/>
+          </a:fontRef>
+        </p:style>
+        <p:txBody>
+          <a:bodyPr rtlCol="0" anchor="ctr" wrap="square" tIns="18288" bIns="18288"/>
+          <a:lstStyle/>
+          <a:p>
+            <a:pPr algn="ctr"/>
+            <a:r>
+              <a:rPr sz="1200" b="1">
+                <a:solidFill>
+                  <a:srgbClr val="FFFFFF"/>
+                </a:solidFill>
+                <a:latin typeface="Meiryo"/>
+                <a:ea typeface="Meiryo"/>
+              </a:rPr>
+              <a:t>KGI:新規契約(モバイル・BB・でんき)</a:t>
+            </a:r>
+          </a:p>
+        </p:txBody>
+      </p:sp>
+      <p:sp>
+        <p:nvSpPr>
+          <p:cNvPr id="21" name="Rounded Rectangle 20"/>
+          <p:cNvSpPr/>
+          <p:nvPr/>
+        </p:nvSpPr>
+        <p:spPr>
+          <a:xfrm>
+            <a:off x="6858000" y="1554480"/>
+            <a:ext cx="4846320" cy="2194560"/>
+          </a:xfrm>
+          <a:prstGeom prst="roundRect">
+            <a:avLst>
+              <a:gd name="adj" fmla="val 5000"/>
+            </a:avLst>
+          </a:prstGeom>
+          <a:solidFill>
+            <a:srgbClr val="F2F4F6"/>
+          </a:solidFill>
+          <a:ln>
+            <a:noFill/>
+          </a:ln>
+          <a:effectLst/>
+        </p:spPr>
+        <p:style>
+          <a:lnRef idx="1">
+            <a:schemeClr val="accent1"/>
+          </a:lnRef>
+          <a:fillRef idx="3">
+            <a:schemeClr val="accent1"/>
+          </a:fillRef>
+          <a:effectRef idx="2">
+            <a:schemeClr val="accent1"/>
+          </a:effectRef>
+          <a:fontRef idx="minor">
+            <a:schemeClr val="lt1"/>
+          </a:fontRef>
+        </p:style>
+        <p:txBody>
+          <a:bodyPr rtlCol="0" anchor="ctr"/>
+          <a:lstStyle/>
+          <a:p>
+            <a:pPr algn="ctr"/>
+          </a:p>
+        </p:txBody>
+      </p:sp>
+      <p:sp>
+        <p:nvSpPr>
+          <p:cNvPr id="22" name="TextBox 21"/>
+          <p:cNvSpPr txBox="1"/>
+          <p:nvPr/>
+        </p:nvSpPr>
+        <p:spPr>
+          <a:xfrm>
+            <a:off x="7086600" y="1737360"/>
+            <a:ext cx="4389120" cy="1828800"/>
+          </a:xfrm>
+          <a:prstGeom prst="rect">
+            <a:avLst/>
+          </a:prstGeom>
+          <a:noFill/>
+        </p:spPr>
+        <p:txBody>
+          <a:bodyPr wrap="square" anchor="t" lIns="0" rIns="0" tIns="0" bIns="0">
+            <a:spAutoFit/>
+          </a:bodyPr>
+          <a:lstStyle/>
+          <a:p>
+            <a:pPr algn="l">
+              <a:spcAft>
+                <a:spcPts val="800"/>
+              </a:spcAft>
+            </a:pPr>
+            <a:r>
+              <a:rPr sz="1300" b="1">
+                <a:solidFill>
+                  <a:srgbClr val="C00000"/>
+                </a:solidFill>
+                <a:latin typeface="Meiryo"/>
+                <a:ea typeface="Meiryo"/>
+              </a:rPr>
+              <a:t>下限・上限の定義</a:t>
+            </a:r>
+          </a:p>
+          <a:p>
+            <a:pPr algn="l">
+              <a:spcAft>
+                <a:spcPts val="800"/>
+              </a:spcAft>
+            </a:pPr>
+            <a:r>
+              <a:rPr sz="1200" b="0">
+                <a:solidFill>
+                  <a:srgbClr val="1A1A1A"/>
+                </a:solidFill>
+                <a:latin typeface="Meiryo"/>
+                <a:ea typeface="Meiryo"/>
+              </a:rPr>
+              <a:t>・下限:10施設×週1回(年80開催日)の必達水準</a:t>
+            </a:r>
+          </a:p>
+          <a:p>
+            <a:pPr algn="l">
+              <a:spcAft>
+                <a:spcPts val="800"/>
+              </a:spcAft>
+            </a:pPr>
+            <a:r>
+              <a:rPr sz="1200" b="0">
+                <a:solidFill>
+                  <a:srgbClr val="1A1A1A"/>
+                </a:solidFill>
+                <a:latin typeface="Meiryo"/>
+                <a:ea typeface="Meiryo"/>
+              </a:rPr>
+              <a:t>・上限:20施設×週2回(年160開催日)のストレッチ水準</a:t>
+            </a:r>
+          </a:p>
+          <a:p>
+            <a:pPr algn="l">
+              <a:spcAft>
+                <a:spcPts val="800"/>
+              </a:spcAft>
+            </a:pPr>
+            <a:r>
+              <a:rPr sz="1200" b="0">
+                <a:solidFill>
+                  <a:srgbClr val="1A1A1A"/>
+                </a:solidFill>
+                <a:latin typeface="Meiryo"/>
+                <a:ea typeface="Meiryo"/>
+              </a:rPr>
+              <a:t>・幅は「計画のブレ」ではなく、施設数・開催頻度の運用レンジに対応</a:t>
+            </a:r>
+          </a:p>
+        </p:txBody>
+      </p:sp>
+      <p:sp>
+        <p:nvSpPr>
+          <p:cNvPr id="23" name="Rounded Rectangle 22"/>
+          <p:cNvSpPr/>
+          <p:nvPr/>
+        </p:nvSpPr>
+        <p:spPr>
+          <a:xfrm>
+            <a:off x="6858000" y="3931920"/>
+            <a:ext cx="4846320" cy="1965960"/>
+          </a:xfrm>
+          <a:prstGeom prst="roundRect">
+            <a:avLst>
+              <a:gd name="adj" fmla="val 5000"/>
+            </a:avLst>
+          </a:prstGeom>
+          <a:solidFill>
+            <a:srgbClr val="FBEAEB"/>
+          </a:solidFill>
+          <a:ln>
+            <a:noFill/>
+          </a:ln>
+          <a:effectLst/>
+        </p:spPr>
+        <p:style>
+          <a:lnRef idx="1">
+            <a:schemeClr val="accent1"/>
+          </a:lnRef>
+          <a:fillRef idx="3">
+            <a:schemeClr val="accent1"/>
+          </a:fillRef>
+          <a:effectRef idx="2">
+            <a:schemeClr val="accent1"/>
+          </a:effectRef>
+          <a:fontRef idx="minor">
+            <a:schemeClr val="lt1"/>
+          </a:fontRef>
+        </p:style>
+        <p:txBody>
+          <a:bodyPr rtlCol="0" anchor="ctr"/>
+          <a:lstStyle/>
+          <a:p>
+            <a:pPr algn="ctr"/>
+          </a:p>
+        </p:txBody>
+      </p:sp>
+      <p:sp>
+        <p:nvSpPr>
+          <p:cNvPr id="24" name="TextBox 23"/>
+          <p:cNvSpPr txBox="1"/>
+          <p:nvPr/>
+        </p:nvSpPr>
+        <p:spPr>
+          <a:xfrm>
+            <a:off x="7086600" y="4114800"/>
+            <a:ext cx="4389120" cy="1645920"/>
+          </a:xfrm>
+          <a:prstGeom prst="rect">
+            <a:avLst/>
+          </a:prstGeom>
+          <a:noFill/>
+        </p:spPr>
+        <p:txBody>
+          <a:bodyPr wrap="square" anchor="t" lIns="0" rIns="0" tIns="0" bIns="0">
+            <a:spAutoFit/>
+          </a:bodyPr>
+          <a:lstStyle/>
+          <a:p>
+            <a:pPr algn="l">
+              <a:spcAft>
+                <a:spcPts val="800"/>
+              </a:spcAft>
+            </a:pPr>
+            <a:r>
+              <a:rPr sz="1300" b="1">
+                <a:solidFill>
+                  <a:srgbClr val="C00000"/>
+                </a:solidFill>
+                <a:latin typeface="Meiryo"/>
+                <a:ea typeface="Meiryo"/>
+              </a:rPr>
+              <a:t>検証による精緻化</a:t>
+            </a:r>
+          </a:p>
+          <a:p>
+            <a:pPr algn="l">
+              <a:spcAft>
+                <a:spcPts val="800"/>
+              </a:spcAft>
+            </a:pPr>
+            <a:r>
+              <a:rPr sz="1200" b="0">
+                <a:solidFill>
+                  <a:srgbClr val="1A1A1A"/>
+                </a:solidFill>
+                <a:latin typeface="Meiryo"/>
+                <a:ea typeface="Meiryo"/>
+              </a:rPr>
+              <a:t>・FY27期首(A案フェーズ)で全転換率を実測</a:t>
+            </a:r>
+          </a:p>
+          <a:p>
+            <a:pPr algn="l">
+              <a:spcAft>
+                <a:spcPts val="800"/>
+              </a:spcAft>
+            </a:pPr>
+            <a:r>
+              <a:rPr sz="1200" b="0">
+                <a:solidFill>
+                  <a:srgbClr val="1A1A1A"/>
+                </a:solidFill>
+                <a:latin typeface="Meiryo"/>
+                <a:ea typeface="Meiryo"/>
+              </a:rPr>
+              <a:t>・デジタル隊員証のQR発行・店舗チェックインが計測基盤</a:t>
+            </a:r>
+          </a:p>
+          <a:p>
+            <a:pPr algn="l">
+              <a:spcAft>
+                <a:spcPts val="800"/>
+              </a:spcAft>
+            </a:pPr>
+            <a:r>
+              <a:rPr sz="1200" b="0">
+                <a:solidFill>
+                  <a:srgbClr val="1A1A1A"/>
+                </a:solidFill>
+                <a:latin typeface="Meiryo"/>
+                <a:ea typeface="Meiryo"/>
+              </a:rPr>
+              <a:t>・実測値で年間KPIを更新し、月次レポートで進捗を開示</a:t>
+            </a:r>
+          </a:p>
+        </p:txBody>
+      </p:sp>
+    </p:spTree>
+  </p:cSld>
+  <p:clrMapOvr>
+    <a:masterClrMapping/>
+  </p:clrMapOvr>
+</p:sld>
+</file>
+
+<file path=ppt/slides/slide36.xml><?xml version="1.0" encoding="utf-8"?>
+<p:sld xmlns:a="http://schemas.openxmlformats.org/drawingml/2006/main" xmlns:p="http://schemas.openxmlformats.org/presentationml/2006/main" xmlns:r="http://schemas.openxmlformats.org/officeDocument/2006/relationships">
+  <p:cSld>
+    <p:spTree>
+      <p:nvGrpSpPr>
+        <p:cNvPr id="1" name=""/>
+        <p:cNvGrpSpPr/>
+        <p:nvPr/>
+      </p:nvGrpSpPr>
+      <p:grpSpPr/>
+      <p:pic>
+        <p:nvPicPr>
+          <p:cNvPr id="2" name="Picture 1" descr="band_header.png"/>
+          <p:cNvPicPr>
+            <a:picLocks noChangeAspect="1"/>
+          </p:cNvPicPr>
+          <p:nvPr/>
+        </p:nvPicPr>
+        <p:blipFill>
+          <a:blip r:embed="rId2"/>
+          <a:stretch>
+            <a:fillRect/>
+          </a:stretch>
+        </p:blipFill>
+        <p:spPr>
+          <a:xfrm>
+            <a:off x="0" y="0"/>
+            <a:ext cx="12191695" cy="786384"/>
+          </a:xfrm>
+          <a:prstGeom prst="rect">
+            <a:avLst/>
+          </a:prstGeom>
+        </p:spPr>
+      </p:pic>
+      <p:sp>
+        <p:nvSpPr>
+          <p:cNvPr id="3" name="TextBox 2"/>
+          <p:cNvSpPr txBox="1"/>
+          <p:nvPr/>
+        </p:nvSpPr>
+        <p:spPr>
+          <a:xfrm>
+            <a:off x="457200" y="73152"/>
+            <a:ext cx="10241280" cy="640080"/>
+          </a:xfrm>
+          <a:prstGeom prst="rect">
+            <a:avLst/>
+          </a:prstGeom>
+          <a:noFill/>
+        </p:spPr>
+        <p:txBody>
+          <a:bodyPr wrap="square" anchor="ctr" lIns="0" rIns="0" tIns="0" bIns="0">
+            <a:spAutoFit/>
+          </a:bodyPr>
+          <a:lstStyle/>
+          <a:p>
+            <a:pPr algn="l">
+              <a:spcAft>
+                <a:spcPts val="600"/>
+              </a:spcAft>
+            </a:pPr>
+            <a:r>
+              <a:rPr sz="2100" b="1">
+                <a:solidFill>
+                  <a:srgbClr val="FFFFFF"/>
+                </a:solidFill>
+                <a:latin typeface="Meiryo"/>
+                <a:ea typeface="Meiryo"/>
+              </a:rPr>
+              <a:t>Appendix③:ご参考 — 投資対効果の考え方(世帯LTVベース)</a:t>
+            </a:r>
+          </a:p>
+        </p:txBody>
+      </p:sp>
+      <p:sp>
+        <p:nvSpPr>
+          <p:cNvPr id="4" name="TextBox 3"/>
+          <p:cNvSpPr txBox="1"/>
+          <p:nvPr/>
+        </p:nvSpPr>
+        <p:spPr>
+          <a:xfrm>
+            <a:off x="502920" y="896112"/>
+            <a:ext cx="11155680" cy="365760"/>
+          </a:xfrm>
+          <a:prstGeom prst="rect">
+            <a:avLst/>
+          </a:prstGeom>
+          <a:noFill/>
+        </p:spPr>
+        <p:txBody>
+          <a:bodyPr wrap="square" anchor="t" lIns="0" rIns="0" tIns="0" bIns="0">
+            <a:spAutoFit/>
+          </a:bodyPr>
+          <a:lstStyle/>
+          <a:p>
+            <a:pPr algn="l">
+              <a:spcAft>
+                <a:spcPts val="600"/>
+              </a:spcAft>
+            </a:pPr>
+            <a:r>
+              <a:rPr sz="1250" b="0">
+                <a:solidFill>
+                  <a:srgbClr val="5A626B"/>
+                </a:solidFill>
+                <a:latin typeface="Meiryo"/>
+                <a:ea typeface="Meiryo"/>
+              </a:rPr>
+              <a:t>本企画の狙いは単回線の獲得ではなく、家族契約+BB+でんきの「世帯バンドル」獲得です</a:t>
+            </a:r>
+          </a:p>
+        </p:txBody>
+      </p:sp>
+      <p:sp>
+        <p:nvSpPr>
+          <p:cNvPr id="5" name="TextBox 4"/>
+          <p:cNvSpPr txBox="1"/>
+          <p:nvPr/>
+        </p:nvSpPr>
+        <p:spPr>
+          <a:xfrm>
+            <a:off x="4727448" y="6547104"/>
+            <a:ext cx="2743200" cy="256032"/>
+          </a:xfrm>
+          <a:prstGeom prst="rect">
+            <a:avLst/>
+          </a:prstGeom>
+          <a:noFill/>
+        </p:spPr>
+        <p:txBody>
+          <a:bodyPr wrap="square" anchor="t" lIns="0" rIns="0" tIns="0" bIns="0">
+            <a:spAutoFit/>
+          </a:bodyPr>
+          <a:lstStyle/>
+          <a:p>
+            <a:pPr algn="ctr">
+              <a:spcAft>
+                <a:spcPts val="600"/>
+              </a:spcAft>
+            </a:pPr>
+            <a:r>
+              <a:rPr sz="800" b="0">
+                <a:solidFill>
+                  <a:srgbClr val="8E949B"/>
+                </a:solidFill>
+                <a:latin typeface="Meiryo"/>
+                <a:ea typeface="Meiryo"/>
+              </a:rPr>
+              <a:t>© TSUBURAYA PRODUCTIONS</a:t>
+            </a:r>
+          </a:p>
+        </p:txBody>
+      </p:sp>
+      <p:sp>
+        <p:nvSpPr>
+          <p:cNvPr id="6" name="TextBox 5"/>
+          <p:cNvSpPr txBox="1"/>
+          <p:nvPr/>
+        </p:nvSpPr>
+        <p:spPr>
+          <a:xfrm>
+            <a:off x="9372600" y="6492240"/>
+            <a:ext cx="2011680" cy="274320"/>
+          </a:xfrm>
+          <a:prstGeom prst="rect">
+            <a:avLst/>
+          </a:prstGeom>
+          <a:noFill/>
+        </p:spPr>
+        <p:txBody>
+          <a:bodyPr wrap="square" anchor="t" lIns="0" rIns="0" tIns="0" bIns="0">
+            <a:spAutoFit/>
+          </a:bodyPr>
+          <a:lstStyle/>
+          <a:p>
+            <a:pPr algn="r">
+              <a:spcAft>
+                <a:spcPts val="600"/>
+              </a:spcAft>
+            </a:pPr>
+            <a:r>
+              <a:rPr sz="1000" b="1">
+                <a:solidFill>
+                  <a:srgbClr val="C00000"/>
+                </a:solidFill>
+                <a:latin typeface="Meiryo"/>
+                <a:ea typeface="Meiryo"/>
+              </a:rPr>
+              <a:t>Strictly Confidential</a:t>
+            </a:r>
+          </a:p>
+        </p:txBody>
+      </p:sp>
+      <p:sp>
+        <p:nvSpPr>
+          <p:cNvPr id="7" name="TextBox 6"/>
+          <p:cNvSpPr txBox="1"/>
+          <p:nvPr/>
+        </p:nvSpPr>
+        <p:spPr>
+          <a:xfrm>
+            <a:off x="11521440" y="6492240"/>
+            <a:ext cx="457200" cy="274320"/>
+          </a:xfrm>
+          <a:prstGeom prst="rect">
+            <a:avLst/>
+          </a:prstGeom>
+          <a:noFill/>
+        </p:spPr>
+        <p:txBody>
+          <a:bodyPr wrap="square" anchor="t" lIns="0" rIns="0" tIns="0" bIns="0">
+            <a:spAutoFit/>
+          </a:bodyPr>
+          <a:lstStyle/>
+          <a:p>
+            <a:pPr algn="r">
+              <a:spcAft>
+                <a:spcPts val="600"/>
+              </a:spcAft>
+            </a:pPr>
+            <a:r>
+              <a:rPr sz="1000" b="0">
+                <a:solidFill>
+                  <a:srgbClr val="8E949B"/>
+                </a:solidFill>
+                <a:latin typeface="Meiryo"/>
+                <a:ea typeface="Meiryo"/>
+              </a:rPr>
+              <a:t>36</a:t>
+            </a:r>
+          </a:p>
+        </p:txBody>
+      </p:sp>
+      <p:graphicFrame>
+        <p:nvGraphicFramePr>
+          <p:cNvPr id="8" name="Table 7"/>
+          <p:cNvGraphicFramePr>
+            <a:graphicFrameLocks noGrp="1"/>
+          </p:cNvGraphicFramePr>
+          <p:nvPr/>
+        </p:nvGraphicFramePr>
+        <p:xfrm>
+          <a:off x="640080" y="1600200"/>
+          <a:ext cx="10881359" cy="2852928"/>
+        </p:xfrm>
+        <a:graphic>
+          <a:graphicData uri="http://schemas.openxmlformats.org/drawingml/2006/table">
+            <a:tbl>
+              <a:tblPr firstRow="1" bandRow="1">
+                <a:tableStyleId>{5C22544A-7EE6-4342-B048-85BDC9FD1C3A}</a:tableStyleId>
+              </a:tblPr>
+              <a:tblGrid>
+                <a:gridCol w="6120765"/>
+                <a:gridCol w="4760594"/>
+              </a:tblGrid>
+              <a:tr h="475488">
+                <a:tc>
+                  <a:txBody>
+                    <a:bodyPr/>
+                    <a:lstStyle/>
+                    <a:p>
+                      <a:r>
+                        <a:rPr sz="1150" b="1">
+                          <a:solidFill>
+                            <a:srgbClr val="FFFFFF"/>
+                          </a:solidFill>
+                          <a:latin typeface="Meiryo"/>
+                          <a:ea typeface="Meiryo"/>
+                        </a:rPr>
+                        <a:t>ステップ</a:t>
+                      </a:r>
+                    </a:p>
+                  </a:txBody>
+                  <a:tcPr anchor="ctr" marL="73152" marR="73152" marT="18288" marB="18288">
+                    <a:solidFill>
+                      <a:srgbClr val="232278"/>
+                    </a:solidFill>
+                  </a:tcPr>
+                </a:tc>
+                <a:tc>
+                  <a:txBody>
+                    <a:bodyPr/>
+                    <a:lstStyle/>
+                    <a:p>
+                      <a:r>
+                        <a:rPr sz="1150" b="1">
+                          <a:solidFill>
+                            <a:srgbClr val="FFFFFF"/>
+                          </a:solidFill>
+                          <a:latin typeface="Meiryo"/>
+                          <a:ea typeface="Meiryo"/>
+                        </a:rPr>
+                        <a:t>参考試算</a:t>
+                      </a:r>
+                    </a:p>
+                  </a:txBody>
+                  <a:tcPr anchor="ctr" marL="73152" marR="73152" marT="18288" marB="18288">
+                    <a:solidFill>
+                      <a:srgbClr val="232278"/>
+                    </a:solidFill>
+                  </a:tcPr>
+                </a:tc>
+              </a:tr>
+              <a:tr h="475488">
+                <a:tc>
+                  <a:txBody>
+                    <a:bodyPr/>
+                    <a:lstStyle/>
+                    <a:p>
+                      <a:r>
+                        <a:rPr sz="1250" b="0">
+                          <a:solidFill>
+                            <a:srgbClr val="1A1A1A"/>
+                          </a:solidFill>
+                          <a:latin typeface="Meiryo"/>
+                          <a:ea typeface="Meiryo"/>
+                        </a:rPr>
+                        <a:t>① 見積・来店予約(B案・年間)</a:t>
+                      </a:r>
+                    </a:p>
+                  </a:txBody>
+                  <a:tcPr anchor="ctr" marL="73152" marR="73152" marT="18288" marB="18288">
+                    <a:solidFill>
+                      <a:srgbClr val="FFFFFF"/>
+                    </a:solidFill>
+                  </a:tcPr>
+                </a:tc>
+                <a:tc>
+                  <a:txBody>
+                    <a:bodyPr/>
+                    <a:lstStyle/>
+                    <a:p>
+                      <a:r>
+                        <a:rPr sz="1250" b="0">
+                          <a:solidFill>
+                            <a:srgbClr val="1A1A1A"/>
+                          </a:solidFill>
+                          <a:latin typeface="Meiryo"/>
+                          <a:ea typeface="Meiryo"/>
+                        </a:rPr>
+                        <a:t>500〜1,500件</a:t>
+                      </a:r>
+                    </a:p>
+                  </a:txBody>
+                  <a:tcPr anchor="ctr" marL="73152" marR="73152" marT="18288" marB="18288">
+                    <a:solidFill>
+                      <a:srgbClr val="FFFFFF"/>
+                    </a:solidFill>
+                  </a:tcPr>
+                </a:tc>
+              </a:tr>
+              <a:tr h="475488">
+                <a:tc>
+                  <a:txBody>
+                    <a:bodyPr/>
+                    <a:lstStyle/>
+                    <a:p>
+                      <a:r>
+                        <a:rPr sz="1250" b="0">
+                          <a:solidFill>
+                            <a:srgbClr val="1A1A1A"/>
+                          </a:solidFill>
+                          <a:latin typeface="Meiryo"/>
+                          <a:ea typeface="Meiryo"/>
+                        </a:rPr>
+                        <a:t>② 成約率(店頭+後日オンライン転換)</a:t>
+                      </a:r>
+                    </a:p>
+                  </a:txBody>
+                  <a:tcPr anchor="ctr" marL="73152" marR="73152" marT="18288" marB="18288">
+                    <a:solidFill>
+                      <a:srgbClr val="F2F4F6"/>
+                    </a:solidFill>
+                  </a:tcPr>
+                </a:tc>
+                <a:tc>
+                  <a:txBody>
+                    <a:bodyPr/>
+                    <a:lstStyle/>
+                    <a:p>
+                      <a:r>
+                        <a:rPr sz="1250" b="0">
+                          <a:solidFill>
+                            <a:srgbClr val="1A1A1A"/>
+                          </a:solidFill>
+                          <a:latin typeface="Meiryo"/>
+                          <a:ea typeface="Meiryo"/>
+                        </a:rPr>
+                        <a:t>3〜5割 → 年間150〜750世帯の新規獲得</a:t>
+                      </a:r>
+                    </a:p>
+                  </a:txBody>
+                  <a:tcPr anchor="ctr" marL="73152" marR="73152" marT="18288" marB="18288">
+                    <a:solidFill>
+                      <a:srgbClr val="F2F4F6"/>
+                    </a:solidFill>
+                  </a:tcPr>
+                </a:tc>
+              </a:tr>
+              <a:tr h="475488">
+                <a:tc>
+                  <a:txBody>
+                    <a:bodyPr/>
+                    <a:lstStyle/>
+                    <a:p>
+                      <a:r>
+                        <a:rPr sz="1250" b="0">
+                          <a:solidFill>
+                            <a:srgbClr val="1A1A1A"/>
+                          </a:solidFill>
+                          <a:latin typeface="Meiryo"/>
+                          <a:ea typeface="Meiryo"/>
+                        </a:rPr>
+                        <a:t>③ 世帯あたり月額(モバイル2回線+光/Air+でんきのバンドル想定)</a:t>
+                      </a:r>
+                    </a:p>
+                  </a:txBody>
+                  <a:tcPr anchor="ctr" marL="73152" marR="73152" marT="18288" marB="18288">
+                    <a:solidFill>
+                      <a:srgbClr val="FFFFFF"/>
+                    </a:solidFill>
+                  </a:tcPr>
+                </a:tc>
+                <a:tc>
+                  <a:txBody>
+                    <a:bodyPr/>
+                    <a:lstStyle/>
+                    <a:p>
+                      <a:r>
+                        <a:rPr sz="1250" b="0">
+                          <a:solidFill>
+                            <a:srgbClr val="1A1A1A"/>
+                          </a:solidFill>
+                          <a:latin typeface="Meiryo"/>
+                          <a:ea typeface="Meiryo"/>
+                        </a:rPr>
+                        <a:t>約15,000円/月</a:t>
+                      </a:r>
+                    </a:p>
+                  </a:txBody>
+                  <a:tcPr anchor="ctr" marL="73152" marR="73152" marT="18288" marB="18288">
+                    <a:solidFill>
+                      <a:srgbClr val="FFFFFF"/>
+                    </a:solidFill>
+                  </a:tcPr>
+                </a:tc>
+              </a:tr>
+              <a:tr h="475488">
+                <a:tc>
+                  <a:txBody>
+                    <a:bodyPr/>
+                    <a:lstStyle/>
+                    <a:p>
+                      <a:r>
+                        <a:rPr sz="1250" b="1">
+                          <a:solidFill>
+                            <a:srgbClr val="1A1A1A"/>
+                          </a:solidFill>
+                          <a:latin typeface="Meiryo"/>
+                          <a:ea typeface="Meiryo"/>
+                        </a:rPr>
+                        <a:t>④ 世帯LTV(36か月継続想定)</a:t>
+                      </a:r>
+                    </a:p>
+                  </a:txBody>
+                  <a:tcPr anchor="ctr" marL="73152" marR="73152" marT="18288" marB="18288">
+                    <a:solidFill>
+                      <a:srgbClr val="F2F4F6"/>
+                    </a:solidFill>
+                  </a:tcPr>
+                </a:tc>
+                <a:tc>
+                  <a:txBody>
+                    <a:bodyPr/>
+                    <a:lstStyle/>
+                    <a:p>
+                      <a:r>
+                        <a:rPr sz="1250" b="1">
+                          <a:solidFill>
+                            <a:srgbClr val="C00000"/>
+                          </a:solidFill>
+                          <a:latin typeface="Meiryo"/>
+                          <a:ea typeface="Meiryo"/>
+                        </a:rPr>
+                        <a:t>約54万円/世帯</a:t>
+                      </a:r>
+                    </a:p>
+                  </a:txBody>
+                  <a:tcPr anchor="ctr" marL="73152" marR="73152" marT="18288" marB="18288">
+                    <a:solidFill>
+                      <a:srgbClr val="F2F4F6"/>
+                    </a:solidFill>
+                  </a:tcPr>
+                </a:tc>
+              </a:tr>
+              <a:tr h="475488">
+                <a:tc>
+                  <a:txBody>
+                    <a:bodyPr/>
+                    <a:lstStyle/>
+                    <a:p>
+                      <a:r>
+                        <a:rPr sz="1250" b="1">
+                          <a:solidFill>
+                            <a:srgbClr val="1A1A1A"/>
+                          </a:solidFill>
+                          <a:latin typeface="Meiryo"/>
+                          <a:ea typeface="Meiryo"/>
+                        </a:rPr>
+                        <a:t>⑤ 年間売上創出規模(②×④)</a:t>
+                      </a:r>
+                    </a:p>
+                  </a:txBody>
+                  <a:tcPr anchor="ctr" marL="73152" marR="73152" marT="18288" marB="18288">
+                    <a:solidFill>
+                      <a:srgbClr val="FFFFFF"/>
+                    </a:solidFill>
+                  </a:tcPr>
+                </a:tc>
+                <a:tc>
+                  <a:txBody>
+                    <a:bodyPr/>
+                    <a:lstStyle/>
+                    <a:p>
+                      <a:r>
+                        <a:rPr sz="1250" b="1">
+                          <a:solidFill>
+                            <a:srgbClr val="C00000"/>
+                          </a:solidFill>
+                          <a:latin typeface="Meiryo"/>
+                          <a:ea typeface="Meiryo"/>
+                        </a:rPr>
+                        <a:t>約8,000万円〜4億円</a:t>
+                      </a:r>
+                    </a:p>
+                  </a:txBody>
+                  <a:tcPr anchor="ctr" marL="73152" marR="73152" marT="18288" marB="18288">
+                    <a:solidFill>
+                      <a:srgbClr val="FFFFFF"/>
+                    </a:solidFill>
+                  </a:tcPr>
+                </a:tc>
+              </a:tr>
+            </a:tbl>
+          </a:graphicData>
+        </a:graphic>
+      </p:graphicFrame>
+      <p:sp>
+        <p:nvSpPr>
+          <p:cNvPr id="9" name="Rectangle 8"/>
+          <p:cNvSpPr/>
+          <p:nvPr/>
+        </p:nvSpPr>
+        <p:spPr>
+          <a:xfrm>
+            <a:off x="640080" y="4434840"/>
+            <a:ext cx="10881360" cy="1005840"/>
+          </a:xfrm>
+          <a:prstGeom prst="rect">
+            <a:avLst/>
+          </a:prstGeom>
+          <a:solidFill>
+            <a:srgbClr val="FBEAEB"/>
+          </a:solidFill>
+          <a:ln>
+            <a:noFill/>
+          </a:ln>
+          <a:effectLst/>
+        </p:spPr>
+        <p:style>
+          <a:lnRef idx="1">
+            <a:schemeClr val="accent1"/>
+          </a:lnRef>
+          <a:fillRef idx="3">
+            <a:schemeClr val="accent1"/>
+          </a:fillRef>
+          <a:effectRef idx="2">
+            <a:schemeClr val="accent1"/>
+          </a:effectRef>
+          <a:fontRef idx="minor">
+            <a:schemeClr val="lt1"/>
+          </a:fontRef>
+        </p:style>
+        <p:txBody>
+          <a:bodyPr rtlCol="0" anchor="ctr"/>
+          <a:lstStyle/>
+          <a:p>
+            <a:pPr algn="ctr"/>
+          </a:p>
+        </p:txBody>
+      </p:sp>
+      <p:sp>
+        <p:nvSpPr>
+          <p:cNvPr id="10" name="TextBox 9"/>
+          <p:cNvSpPr txBox="1"/>
+          <p:nvPr/>
+        </p:nvSpPr>
+        <p:spPr>
+          <a:xfrm>
+            <a:off x="914400" y="4572000"/>
+            <a:ext cx="10332720" cy="777240"/>
+          </a:xfrm>
+          <a:prstGeom prst="rect">
+            <a:avLst/>
+          </a:prstGeom>
+          <a:noFill/>
+        </p:spPr>
+        <p:txBody>
+          <a:bodyPr wrap="square" anchor="t" lIns="0" rIns="0" tIns="0" bIns="0">
+            <a:spAutoFit/>
+          </a:bodyPr>
+          <a:lstStyle/>
+          <a:p>
+            <a:pPr algn="l">
+              <a:spcAft>
+                <a:spcPts val="400"/>
+              </a:spcAft>
+            </a:pPr>
+            <a:r>
+              <a:rPr sz="1300" b="0">
+                <a:solidFill>
+                  <a:srgbClr val="1A1A1A"/>
+                </a:solidFill>
+                <a:latin typeface="Meiryo"/>
+                <a:ea typeface="Meiryo"/>
+              </a:rPr>
+              <a:t>さらに、場所代の削減効果(本編「実質負担の考え方」参照)と、来店意向のない層との接点創出・既存顧客の定着効果を加味すると、</a:t>
+            </a:r>
+          </a:p>
+          <a:p>
+            <a:pPr algn="l">
+              <a:spcAft>
+                <a:spcPts val="400"/>
+              </a:spcAft>
+            </a:pPr>
+            <a:r>
+              <a:rPr sz="1400" b="1">
+                <a:solidFill>
+                  <a:srgbClr val="C00000"/>
+                </a:solidFill>
+                <a:latin typeface="Meiryo"/>
+                <a:ea typeface="Meiryo"/>
+              </a:rPr>
+              <a:t>本企画の投資対効果は獲得単価の単純比較を大きく上回ります。</a:t>
+            </a:r>
+          </a:p>
+        </p:txBody>
+      </p:sp>
+      <p:sp>
+        <p:nvSpPr>
+          <p:cNvPr id="11" name="TextBox 10"/>
+          <p:cNvSpPr txBox="1"/>
+          <p:nvPr/>
+        </p:nvSpPr>
+        <p:spPr>
+          <a:xfrm>
+            <a:off x="640080" y="5623560"/>
+            <a:ext cx="10881360" cy="457200"/>
+          </a:xfrm>
+          <a:prstGeom prst="rect">
+            <a:avLst/>
+          </a:prstGeom>
+          <a:noFill/>
+        </p:spPr>
+        <p:txBody>
+          <a:bodyPr wrap="square" anchor="t" lIns="0" rIns="0" tIns="0" bIns="0">
+            <a:spAutoFit/>
+          </a:bodyPr>
+          <a:lstStyle/>
+          <a:p>
+            <a:pPr algn="l">
+              <a:spcAft>
+                <a:spcPts val="600"/>
+              </a:spcAft>
+            </a:pPr>
+            <a:r>
+              <a:rPr sz="1050" b="0">
+                <a:solidFill>
+                  <a:srgbClr val="5A626B"/>
+                </a:solidFill>
+                <a:latin typeface="Meiryo"/>
+                <a:ea typeface="Meiryo"/>
+              </a:rPr>
+              <a:t>※世帯単価・成約率・継続期間は一般的な水準に基づく参考試算であり、成果をお約束するものではありません。長期利用ユーザーの獲得・定着という貴社コンシューマ事業方針に沿った評価軸としてご提示するものです。</a:t>
             </a:r>
           </a:p>
         </p:txBody>

--- a/docs/proposals/softbank-ultraman-caravan/SoftBank_Ultraman_未来防衛隊キャラバン_提案資料.pptx
+++ b/docs/proposals/softbank-ultraman-caravan/SoftBank_Ultraman_未来防衛隊キャラバン_提案資料.pptx
@@ -13030,7 +13030,7 @@
                           <a:latin typeface="Meiryo"/>
                           <a:ea typeface="Meiryo"/>
                         </a:rPr>
-                        <a:t>月額換算約300〜400万円×3〜4か月。短期プロモーションライセンスの一般的な水準(1クール数百万〜数千万円)の範囲内</a:t>
+                        <a:t>年間契約(B案)の月額水準・約670万円がベースレート。標準では3〜4か月で約2,400万円のところ、非独占・2〜3施設・限定媒体の条件かつB案(年間契約)への移行を前提とした導入特別価格(約50%)として設定</a:t>
                       </a:r>
                     </a:p>
                   </a:txBody>
@@ -13563,7 +13563,7 @@
                           <a:latin typeface="Meiryo"/>
                           <a:ea typeface="Meiryo"/>
                         </a:rPr>
-                        <a:t>ウルトラマンIP使用料・監修費</a:t>
+                        <a:t>ウルトラマンIP使用料・監修費(導入特別価格)</a:t>
                       </a:r>
                     </a:p>
                   </a:txBody>
@@ -14535,7 +14535,7 @@
                 <a:latin typeface="Meiryo"/>
                 <a:ea typeface="Meiryo"/>
               </a:rPr>
-              <a:t>※IP使用料は月額換算約300〜400万円で、短期プロモーションライセンスの一般的な水準の範囲内。ヒーロー登場・運営費は2〜3施設×週末開催(計8〜12回想定)で積算しています。</a:t>
+              <a:t>※IP使用料1,200万円は、標準価格約2,400万円(B案の月額水準×3〜4か月)に対し、B案(年間契約)への移行を前提とした導入特別価格です。ヒーロー登場・運営費は2〜3施設×週末開催(計8〜12回想定)で積算しています。</a:t>
             </a:r>
           </a:p>
         </p:txBody>

--- a/docs/proposals/softbank-ultraman-caravan/SoftBank_Ultraman_未来防衛隊キャラバン_提案資料.pptx
+++ b/docs/proposals/softbank-ultraman-caravan/SoftBank_Ultraman_未来防衛隊キャラバン_提案資料.pptx
@@ -22345,7 +22345,7 @@
                 <a:latin typeface="Meiryo"/>
                 <a:ea typeface="Meiryo"/>
               </a:rPr>
-              <a:t>SoftBank・円谷プロダクション・提案側チームの三者連携で推進します</a:t>
+              <a:t>貴社と円谷プロダクション(企画・稼働・監修)+制作パートナーの連携体制で推進します</a:t>
             </a:r>
           </a:p>
         </p:txBody>
@@ -22479,8 +22479,8 @@
           <p:nvPr/>
         </p:nvGraphicFramePr>
         <p:xfrm>
-          <a:off x="640080" y="1645920"/>
-          <a:ext cx="10881360" cy="4023360"/>
+          <a:off x="640080" y="1554480"/>
+          <a:ext cx="10881359" cy="4608576"/>
         </p:xfrm>
         <a:graphic>
           <a:graphicData uri="http://schemas.openxmlformats.org/drawingml/2006/table">
@@ -22489,10 +22489,10 @@
                 <a:tableStyleId>{5C22544A-7EE6-4342-B048-85BDC9FD1C3A}</a:tableStyleId>
               </a:tblPr>
               <a:tblGrid>
-                <a:gridCol w="3627120"/>
-                <a:gridCol w="7254240"/>
+                <a:gridCol w="3861127"/>
+                <a:gridCol w="7020232"/>
               </a:tblGrid>
-              <a:tr h="402336">
+              <a:tr h="384048">
                 <a:tc>
                   <a:txBody>
                     <a:bodyPr/>
@@ -22540,14 +22540,14 @@
                   </a:tcPr>
                 </a:tc>
               </a:tr>
-              <a:tr h="402336">
-                <a:tc>
-                  <a:txBody>
-                    <a:bodyPr/>
-                    <a:lstStyle/>
-                    <a:p>
-                      <a:r>
-                        <a:rPr sz="1250" b="0">
+              <a:tr h="384048">
+                <a:tc>
+                  <a:txBody>
+                    <a:bodyPr/>
+                    <a:lstStyle/>
+                    <a:p>
+                      <a:r>
+                        <a:rPr sz="1200" b="0">
                           <a:solidFill>
                             <a:srgbClr val="1A1A1A"/>
                           </a:solidFill>
@@ -22570,7 +22570,7 @@
                     <a:lstStyle/>
                     <a:p>
                       <a:r>
-                        <a:rPr sz="1250" b="0">
+                        <a:rPr sz="1200" b="0">
                           <a:solidFill>
                             <a:srgbClr val="1A1A1A"/>
                           </a:solidFill>
@@ -22588,21 +22588,21 @@
                   </a:tcPr>
                 </a:tc>
               </a:tr>
-              <a:tr h="402336">
-                <a:tc>
-                  <a:txBody>
-                    <a:bodyPr/>
-                    <a:lstStyle/>
-                    <a:p>
-                      <a:r>
-                        <a:rPr sz="1250" b="0">
-                          <a:solidFill>
-                            <a:srgbClr val="1A1A1A"/>
-                          </a:solidFill>
-                          <a:latin typeface="Meiryo"/>
-                          <a:ea typeface="Meiryo"/>
-                        </a:rPr>
-                        <a:t>IP監修</a:t>
+              <a:tr h="384048">
+                <a:tc>
+                  <a:txBody>
+                    <a:bodyPr/>
+                    <a:lstStyle/>
+                    <a:p>
+                      <a:r>
+                        <a:rPr sz="1200" b="0">
+                          <a:solidFill>
+                            <a:srgbClr val="1A1A1A"/>
+                          </a:solidFill>
+                          <a:latin typeface="Meiryo"/>
+                          <a:ea typeface="Meiryo"/>
+                        </a:rPr>
+                        <a:t>企画・プロデュース</a:t>
                       </a:r>
                     </a:p>
                   </a:txBody>
@@ -22618,7 +22618,103 @@
                     <a:lstStyle/>
                     <a:p>
                       <a:r>
-                        <a:rPr sz="1250" b="0">
+                        <a:rPr sz="1200" b="0">
+                          <a:solidFill>
+                            <a:srgbClr val="1A1A1A"/>
+                          </a:solidFill>
+                          <a:latin typeface="Meiryo"/>
+                          <a:ea typeface="Meiryo"/>
+                        </a:rPr>
+                        <a:t>円谷プロダクション(企画開発チーム)</a:t>
+                      </a:r>
+                    </a:p>
+                  </a:txBody>
+                  <a:tcPr anchor="ctr" marL="73152" marR="73152" marT="18288" marB="18288">
+                    <a:solidFill>
+                      <a:srgbClr val="F2F4F6"/>
+                    </a:solidFill>
+                  </a:tcPr>
+                </a:tc>
+              </a:tr>
+              <a:tr h="384048">
+                <a:tc>
+                  <a:txBody>
+                    <a:bodyPr/>
+                    <a:lstStyle/>
+                    <a:p>
+                      <a:r>
+                        <a:rPr sz="1200" b="1">
+                          <a:solidFill>
+                            <a:srgbClr val="1A1A1A"/>
+                          </a:solidFill>
+                          <a:latin typeface="Meiryo"/>
+                          <a:ea typeface="Meiryo"/>
+                        </a:rPr>
+                        <a:t>ヒーロー稼働・ショー運営</a:t>
+                      </a:r>
+                    </a:p>
+                  </a:txBody>
+                  <a:tcPr anchor="ctr" marL="73152" marR="73152" marT="18288" marB="18288">
+                    <a:solidFill>
+                      <a:srgbClr val="FFFFFF"/>
+                    </a:solidFill>
+                  </a:tcPr>
+                </a:tc>
+                <a:tc>
+                  <a:txBody>
+                    <a:bodyPr/>
+                    <a:lstStyle/>
+                    <a:p>
+                      <a:r>
+                        <a:rPr sz="1200" b="1">
+                          <a:solidFill>
+                            <a:srgbClr val="1A1A1A"/>
+                          </a:solidFill>
+                          <a:latin typeface="Meiryo"/>
+                          <a:ea typeface="Meiryo"/>
+                        </a:rPr>
+                        <a:t>円谷プロダクション(自社アクター・造形体制による安定供給)</a:t>
+                      </a:r>
+                    </a:p>
+                  </a:txBody>
+                  <a:tcPr anchor="ctr" marL="73152" marR="73152" marT="18288" marB="18288">
+                    <a:solidFill>
+                      <a:srgbClr val="FFFFFF"/>
+                    </a:solidFill>
+                  </a:tcPr>
+                </a:tc>
+              </a:tr>
+              <a:tr h="384048">
+                <a:tc>
+                  <a:txBody>
+                    <a:bodyPr/>
+                    <a:lstStyle/>
+                    <a:p>
+                      <a:r>
+                        <a:rPr sz="1200" b="0">
+                          <a:solidFill>
+                            <a:srgbClr val="1A1A1A"/>
+                          </a:solidFill>
+                          <a:latin typeface="Meiryo"/>
+                          <a:ea typeface="Meiryo"/>
+                        </a:rPr>
+                        <a:t>IP監修・ライセンス管理</a:t>
+                      </a:r>
+                    </a:p>
+                  </a:txBody>
+                  <a:tcPr anchor="ctr" marL="73152" marR="73152" marT="18288" marB="18288">
+                    <a:solidFill>
+                      <a:srgbClr val="F2F4F6"/>
+                    </a:solidFill>
+                  </a:tcPr>
+                </a:tc>
+                <a:tc>
+                  <a:txBody>
+                    <a:bodyPr/>
+                    <a:lstStyle/>
+                    <a:p>
+                      <a:r>
+                        <a:rPr sz="1200" b="0">
                           <a:solidFill>
                             <a:srgbClr val="1A1A1A"/>
                           </a:solidFill>
@@ -22636,21 +22732,21 @@
                   </a:tcPr>
                 </a:tc>
               </a:tr>
-              <a:tr h="402336">
-                <a:tc>
-                  <a:txBody>
-                    <a:bodyPr/>
-                    <a:lstStyle/>
-                    <a:p>
-                      <a:r>
-                        <a:rPr sz="1250" b="0">
-                          <a:solidFill>
-                            <a:srgbClr val="1A1A1A"/>
-                          </a:solidFill>
-                          <a:latin typeface="Meiryo"/>
-                          <a:ea typeface="Meiryo"/>
-                        </a:rPr>
-                        <a:t>企画・制作</a:t>
+              <a:tr h="384048">
+                <a:tc>
+                  <a:txBody>
+                    <a:bodyPr/>
+                    <a:lstStyle/>
+                    <a:p>
+                      <a:r>
+                        <a:rPr sz="1200" b="0">
+                          <a:solidFill>
+                            <a:srgbClr val="1A1A1A"/>
+                          </a:solidFill>
+                          <a:latin typeface="Meiryo"/>
+                          <a:ea typeface="Meiryo"/>
+                        </a:rPr>
+                        <a:t>制作(KV・LP・ラリーツール)</a:t>
                       </a:r>
                     </a:p>
                   </a:txBody>
@@ -22666,14 +22762,14 @@
                     <a:lstStyle/>
                     <a:p>
                       <a:r>
-                        <a:rPr sz="1250" b="0">
-                          <a:solidFill>
-                            <a:srgbClr val="1A1A1A"/>
-                          </a:solidFill>
-                          <a:latin typeface="Meiryo"/>
-                          <a:ea typeface="Meiryo"/>
-                        </a:rPr>
-                        <a:t>提案側チーム</a:t>
+                        <a:rPr sz="1200" b="0">
+                          <a:solidFill>
+                            <a:srgbClr val="1A1A1A"/>
+                          </a:solidFill>
+                          <a:latin typeface="Meiryo"/>
+                          <a:ea typeface="Meiryo"/>
+                        </a:rPr>
+                        <a:t>円谷プロダクション監修のもと、制作パートナー各社</a:t>
                       </a:r>
                     </a:p>
                   </a:txBody>
@@ -22684,14 +22780,62 @@
                   </a:tcPr>
                 </a:tc>
               </a:tr>
-              <a:tr h="402336">
-                <a:tc>
-                  <a:txBody>
-                    <a:bodyPr/>
-                    <a:lstStyle/>
-                    <a:p>
-                      <a:r>
-                        <a:rPr sz="1250" b="0">
+              <a:tr h="384048">
+                <a:tc>
+                  <a:txBody>
+                    <a:bodyPr/>
+                    <a:lstStyle/>
+                    <a:p>
+                      <a:r>
+                        <a:rPr sz="1200" b="0">
+                          <a:solidFill>
+                            <a:srgbClr val="1A1A1A"/>
+                          </a:solidFill>
+                          <a:latin typeface="Meiryo"/>
+                          <a:ea typeface="Meiryo"/>
+                        </a:rPr>
+                        <a:t>デジタル隊員証・計測導線</a:t>
+                      </a:r>
+                    </a:p>
+                  </a:txBody>
+                  <a:tcPr anchor="ctr" marL="73152" marR="73152" marT="18288" marB="18288">
+                    <a:solidFill>
+                      <a:srgbClr val="F2F4F6"/>
+                    </a:solidFill>
+                  </a:tcPr>
+                </a:tc>
+                <a:tc>
+                  <a:txBody>
+                    <a:bodyPr/>
+                    <a:lstStyle/>
+                    <a:p>
+                      <a:r>
+                        <a:rPr sz="1200" b="0">
+                          <a:solidFill>
+                            <a:srgbClr val="1A1A1A"/>
+                          </a:solidFill>
+                          <a:latin typeface="Meiryo"/>
+                          <a:ea typeface="Meiryo"/>
+                        </a:rPr>
+                        <a:t>円谷プロダクション デザインチーム(内製想定)</a:t>
+                      </a:r>
+                    </a:p>
+                  </a:txBody>
+                  <a:tcPr anchor="ctr" marL="73152" marR="73152" marT="18288" marB="18288">
+                    <a:solidFill>
+                      <a:srgbClr val="F2F4F6"/>
+                    </a:solidFill>
+                  </a:tcPr>
+                </a:tc>
+              </a:tr>
+              <a:tr h="384048">
+                <a:tc>
+                  <a:txBody>
+                    <a:bodyPr/>
+                    <a:lstStyle/>
+                    <a:p>
+                      <a:r>
+                        <a:rPr sz="1200" b="0">
                           <a:solidFill>
                             <a:srgbClr val="1A1A1A"/>
                           </a:solidFill>
@@ -22704,6 +22848,54 @@
                   </a:txBody>
                   <a:tcPr anchor="ctr" marL="73152" marR="73152" marT="18288" marB="18288">
                     <a:solidFill>
+                      <a:srgbClr val="FFFFFF"/>
+                    </a:solidFill>
+                  </a:tcPr>
+                </a:tc>
+                <a:tc>
+                  <a:txBody>
+                    <a:bodyPr/>
+                    <a:lstStyle/>
+                    <a:p>
+                      <a:r>
+                        <a:rPr sz="1200" b="0">
+                          <a:solidFill>
+                            <a:srgbClr val="1A1A1A"/>
+                          </a:solidFill>
+                          <a:latin typeface="Meiryo"/>
+                          <a:ea typeface="Meiryo"/>
+                        </a:rPr>
+                        <a:t>SoftBank営業/代理店/イベント運営側</a:t>
+                      </a:r>
+                    </a:p>
+                  </a:txBody>
+                  <a:tcPr anchor="ctr" marL="73152" marR="73152" marT="18288" marB="18288">
+                    <a:solidFill>
+                      <a:srgbClr val="FFFFFF"/>
+                    </a:solidFill>
+                  </a:tcPr>
+                </a:tc>
+              </a:tr>
+              <a:tr h="384048">
+                <a:tc>
+                  <a:txBody>
+                    <a:bodyPr/>
+                    <a:lstStyle/>
+                    <a:p>
+                      <a:r>
+                        <a:rPr sz="1200" b="0">
+                          <a:solidFill>
+                            <a:srgbClr val="1A1A1A"/>
+                          </a:solidFill>
+                          <a:latin typeface="Meiryo"/>
+                          <a:ea typeface="Meiryo"/>
+                        </a:rPr>
+                        <a:t>店舗連携</a:t>
+                      </a:r>
+                    </a:p>
+                  </a:txBody>
+                  <a:tcPr anchor="ctr" marL="73152" marR="73152" marT="18288" marB="18288">
+                    <a:solidFill>
                       <a:srgbClr val="F2F4F6"/>
                     </a:solidFill>
                   </a:tcPr>
@@ -22714,14 +22906,14 @@
                     <a:lstStyle/>
                     <a:p>
                       <a:r>
-                        <a:rPr sz="1250" b="0">
-                          <a:solidFill>
-                            <a:srgbClr val="1A1A1A"/>
-                          </a:solidFill>
-                          <a:latin typeface="Meiryo"/>
-                          <a:ea typeface="Meiryo"/>
-                        </a:rPr>
-                        <a:t>SoftBank営業/代理店/イベント運営側</a:t>
+                        <a:rPr sz="1200" b="0">
+                          <a:solidFill>
+                            <a:srgbClr val="1A1A1A"/>
+                          </a:solidFill>
+                          <a:latin typeface="Meiryo"/>
+                          <a:ea typeface="Meiryo"/>
+                        </a:rPr>
+                        <a:t>SoftBankショップ、代理店運営会社</a:t>
                       </a:r>
                     </a:p>
                   </a:txBody>
@@ -22732,21 +22924,21 @@
                   </a:tcPr>
                 </a:tc>
               </a:tr>
-              <a:tr h="402336">
-                <a:tc>
-                  <a:txBody>
-                    <a:bodyPr/>
-                    <a:lstStyle/>
-                    <a:p>
-                      <a:r>
-                        <a:rPr sz="1250" b="0">
-                          <a:solidFill>
-                            <a:srgbClr val="1A1A1A"/>
-                          </a:solidFill>
-                          <a:latin typeface="Meiryo"/>
-                          <a:ea typeface="Meiryo"/>
-                        </a:rPr>
-                        <a:t>店舗連携</a:t>
+              <a:tr h="384048">
+                <a:tc>
+                  <a:txBody>
+                    <a:bodyPr/>
+                    <a:lstStyle/>
+                    <a:p>
+                      <a:r>
+                        <a:rPr sz="1200" b="0">
+                          <a:solidFill>
+                            <a:srgbClr val="1A1A1A"/>
+                          </a:solidFill>
+                          <a:latin typeface="Meiryo"/>
+                          <a:ea typeface="Meiryo"/>
+                        </a:rPr>
+                        <a:t>BB/でんき導線</a:t>
                       </a:r>
                     </a:p>
                   </a:txBody>
@@ -22762,14 +22954,14 @@
                     <a:lstStyle/>
                     <a:p>
                       <a:r>
-                        <a:rPr sz="1250" b="0">
-                          <a:solidFill>
-                            <a:srgbClr val="1A1A1A"/>
-                          </a:solidFill>
-                          <a:latin typeface="Meiryo"/>
-                          <a:ea typeface="Meiryo"/>
-                        </a:rPr>
-                        <a:t>SoftBankショップ、代理店運営会社</a:t>
+                        <a:rPr sz="1200" b="0">
+                          <a:solidFill>
+                            <a:srgbClr val="1A1A1A"/>
+                          </a:solidFill>
+                          <a:latin typeface="Meiryo"/>
+                          <a:ea typeface="Meiryo"/>
+                        </a:rPr>
+                        <a:t>各サービス担当部門</a:t>
                       </a:r>
                     </a:p>
                   </a:txBody>
@@ -22780,21 +22972,21 @@
                   </a:tcPr>
                 </a:tc>
               </a:tr>
-              <a:tr h="402336">
-                <a:tc>
-                  <a:txBody>
-                    <a:bodyPr/>
-                    <a:lstStyle/>
-                    <a:p>
-                      <a:r>
-                        <a:rPr sz="1250" b="0">
-                          <a:solidFill>
-                            <a:srgbClr val="1A1A1A"/>
-                          </a:solidFill>
-                          <a:latin typeface="Meiryo"/>
-                          <a:ea typeface="Meiryo"/>
-                        </a:rPr>
-                        <a:t>BB/でんき導線</a:t>
+              <a:tr h="384048">
+                <a:tc>
+                  <a:txBody>
+                    <a:bodyPr/>
+                    <a:lstStyle/>
+                    <a:p>
+                      <a:r>
+                        <a:rPr sz="1200" b="0">
+                          <a:solidFill>
+                            <a:srgbClr val="1A1A1A"/>
+                          </a:solidFill>
+                          <a:latin typeface="Meiryo"/>
+                          <a:ea typeface="Meiryo"/>
+                        </a:rPr>
+                        <a:t>法務・ライセンス</a:t>
                       </a:r>
                     </a:p>
                   </a:txBody>
@@ -22810,14 +23002,14 @@
                     <a:lstStyle/>
                     <a:p>
                       <a:r>
-                        <a:rPr sz="1250" b="0">
-                          <a:solidFill>
-                            <a:srgbClr val="1A1A1A"/>
-                          </a:solidFill>
-                          <a:latin typeface="Meiryo"/>
-                          <a:ea typeface="Meiryo"/>
-                        </a:rPr>
-                        <a:t>各サービス担当部門</a:t>
+                        <a:rPr sz="1200" b="0">
+                          <a:solidFill>
+                            <a:srgbClr val="1A1A1A"/>
+                          </a:solidFill>
+                          <a:latin typeface="Meiryo"/>
+                          <a:ea typeface="Meiryo"/>
+                        </a:rPr>
+                        <a:t>双方法務・ライセンス担当</a:t>
                       </a:r>
                     </a:p>
                   </a:txBody>
@@ -22828,21 +23020,21 @@
                   </a:tcPr>
                 </a:tc>
               </a:tr>
-              <a:tr h="402336">
-                <a:tc>
-                  <a:txBody>
-                    <a:bodyPr/>
-                    <a:lstStyle/>
-                    <a:p>
-                      <a:r>
-                        <a:rPr sz="1250" b="0">
-                          <a:solidFill>
-                            <a:srgbClr val="1A1A1A"/>
-                          </a:solidFill>
-                          <a:latin typeface="Meiryo"/>
-                          <a:ea typeface="Meiryo"/>
-                        </a:rPr>
-                        <a:t>デジタル導線</a:t>
+              <a:tr h="384048">
+                <a:tc>
+                  <a:txBody>
+                    <a:bodyPr/>
+                    <a:lstStyle/>
+                    <a:p>
+                      <a:r>
+                        <a:rPr sz="1200" b="0">
+                          <a:solidFill>
+                            <a:srgbClr val="1A1A1A"/>
+                          </a:solidFill>
+                          <a:latin typeface="Meiryo"/>
+                          <a:ea typeface="Meiryo"/>
+                        </a:rPr>
+                        <a:t>効果測定</a:t>
                       </a:r>
                     </a:p>
                   </a:txBody>
@@ -22858,110 +23050,14 @@
                     <a:lstStyle/>
                     <a:p>
                       <a:r>
-                        <a:rPr sz="1250" b="0">
-                          <a:solidFill>
-                            <a:srgbClr val="1A1A1A"/>
-                          </a:solidFill>
-                          <a:latin typeface="Meiryo"/>
-                          <a:ea typeface="Meiryo"/>
-                        </a:rPr>
-                        <a:t>LP、計測、デジタル隊員証担当</a:t>
-                      </a:r>
-                    </a:p>
-                  </a:txBody>
-                  <a:tcPr anchor="ctr" marL="73152" marR="73152" marT="18288" marB="18288">
-                    <a:solidFill>
-                      <a:srgbClr val="FFFFFF"/>
-                    </a:solidFill>
-                  </a:tcPr>
-                </a:tc>
-              </a:tr>
-              <a:tr h="402336">
-                <a:tc>
-                  <a:txBody>
-                    <a:bodyPr/>
-                    <a:lstStyle/>
-                    <a:p>
-                      <a:r>
-                        <a:rPr sz="1250" b="0">
-                          <a:solidFill>
-                            <a:srgbClr val="1A1A1A"/>
-                          </a:solidFill>
-                          <a:latin typeface="Meiryo"/>
-                          <a:ea typeface="Meiryo"/>
-                        </a:rPr>
-                        <a:t>法務・ライセンス</a:t>
-                      </a:r>
-                    </a:p>
-                  </a:txBody>
-                  <a:tcPr anchor="ctr" marL="73152" marR="73152" marT="18288" marB="18288">
-                    <a:solidFill>
-                      <a:srgbClr val="F2F4F6"/>
-                    </a:solidFill>
-                  </a:tcPr>
-                </a:tc>
-                <a:tc>
-                  <a:txBody>
-                    <a:bodyPr/>
-                    <a:lstStyle/>
-                    <a:p>
-                      <a:r>
-                        <a:rPr sz="1250" b="0">
-                          <a:solidFill>
-                            <a:srgbClr val="1A1A1A"/>
-                          </a:solidFill>
-                          <a:latin typeface="Meiryo"/>
-                          <a:ea typeface="Meiryo"/>
-                        </a:rPr>
-                        <a:t>双方法務・ライセンス担当</a:t>
-                      </a:r>
-                    </a:p>
-                  </a:txBody>
-                  <a:tcPr anchor="ctr" marL="73152" marR="73152" marT="18288" marB="18288">
-                    <a:solidFill>
-                      <a:srgbClr val="F2F4F6"/>
-                    </a:solidFill>
-                  </a:tcPr>
-                </a:tc>
-              </a:tr>
-              <a:tr h="402336">
-                <a:tc>
-                  <a:txBody>
-                    <a:bodyPr/>
-                    <a:lstStyle/>
-                    <a:p>
-                      <a:r>
-                        <a:rPr sz="1250" b="0">
-                          <a:solidFill>
-                            <a:srgbClr val="1A1A1A"/>
-                          </a:solidFill>
-                          <a:latin typeface="Meiryo"/>
-                          <a:ea typeface="Meiryo"/>
-                        </a:rPr>
-                        <a:t>効果測定</a:t>
-                      </a:r>
-                    </a:p>
-                  </a:txBody>
-                  <a:tcPr anchor="ctr" marL="73152" marR="73152" marT="18288" marB="18288">
-                    <a:solidFill>
-                      <a:srgbClr val="FFFFFF"/>
-                    </a:solidFill>
-                  </a:tcPr>
-                </a:tc>
-                <a:tc>
-                  <a:txBody>
-                    <a:bodyPr/>
-                    <a:lstStyle/>
-                    <a:p>
-                      <a:r>
-                        <a:rPr sz="1250" b="0">
-                          <a:solidFill>
-                            <a:srgbClr val="1A1A1A"/>
-                          </a:solidFill>
-                          <a:latin typeface="Meiryo"/>
-                          <a:ea typeface="Meiryo"/>
-                        </a:rPr>
-                        <a:t>SoftBankマーケティング/提案側チーム</a:t>
+                        <a:rPr sz="1200" b="0">
+                          <a:solidFill>
+                            <a:srgbClr val="1A1A1A"/>
+                          </a:solidFill>
+                          <a:latin typeface="Meiryo"/>
+                          <a:ea typeface="Meiryo"/>
+                        </a:rPr>
+                        <a:t>SoftBankマーケティング/円谷プロダクション</a:t>
                       </a:r>
                     </a:p>
                   </a:txBody>
